--- a/ppt/retail-footfall-inventory.pptx
+++ b/ppt/retail-footfall-inventory.pptx
@@ -3101,14 +3101,14 @@
         </p:nvSpPr>
         <p:spPr>
           <a:xfrm>
-            <a:off x="-45720" y="-45720"/>
-            <a:ext cx="12344400" cy="6949440"/>
+            <a:off x="-91440" y="-91440"/>
+            <a:ext cx="12435840" cy="7040880"/>
           </a:xfrm>
           <a:prstGeom prst="rect">
             <a:avLst/>
           </a:prstGeom>
           <a:solidFill>
-            <a:srgbClr val="1B2024"/>
+            <a:srgbClr val="8A3A6B"/>
           </a:solidFill>
           <a:ln>
             <a:noFill/>
@@ -3139,55 +3139,20 @@
       </p:sp>
       <p:sp>
         <p:nvSpPr>
-          <p:cNvPr id="3" name="TextBox 2"/>
-          <p:cNvSpPr txBox="1"/>
-          <p:nvPr/>
-        </p:nvSpPr>
-        <p:spPr>
-          <a:xfrm>
-            <a:off x="777240" y="2194560"/>
-            <a:ext cx="10607040" cy="1554480"/>
-          </a:xfrm>
-          <a:prstGeom prst="rect">
-            <a:avLst/>
-          </a:prstGeom>
-          <a:noFill/>
-        </p:spPr>
-        <p:txBody>
-          <a:bodyPr wrap="square" anchor="t">
-            <a:spAutoFit/>
-          </a:bodyPr>
-          <a:lstStyle/>
-          <a:p>
-            <a:pPr algn="l"/>
-            <a:r>
-              <a:rPr sz="3100" b="1">
-                <a:solidFill>
-                  <a:srgbClr val="BB8CA9"/>
-                </a:solidFill>
-                <a:latin typeface="Verdana"/>
-              </a:rPr>
-              <a:t>Retail Footfall and Inventory Monitoring</a:t>
-            </a:r>
-          </a:p>
-        </p:txBody>
-      </p:sp>
-      <p:sp>
-        <p:nvSpPr>
-          <p:cNvPr id="4" name="Rectangle 3"/>
+          <p:cNvPr id="3" name="Right Triangle 2"/>
           <p:cNvSpPr/>
           <p:nvPr/>
         </p:nvSpPr>
         <p:spPr>
-          <a:xfrm>
-            <a:off x="804672" y="3657600"/>
-            <a:ext cx="3474720" cy="45720"/>
+          <a:xfrm rot="10800000">
+            <a:off x="-91440" y="3108960"/>
+            <a:ext cx="6858000" cy="3840480"/>
           </a:xfrm>
-          <a:prstGeom prst="rect">
+          <a:prstGeom prst="rtTriangle">
             <a:avLst/>
           </a:prstGeom>
           <a:solidFill>
-            <a:srgbClr val="BB8CA9"/>
+            <a:srgbClr val="5B2646"/>
           </a:solidFill>
           <a:ln>
             <a:noFill/>
@@ -3218,14 +3183,58 @@
       </p:sp>
       <p:sp>
         <p:nvSpPr>
+          <p:cNvPr id="4" name="Oval 3"/>
+          <p:cNvSpPr/>
+          <p:nvPr/>
+        </p:nvSpPr>
+        <p:spPr>
+          <a:xfrm>
+            <a:off x="9966960" y="685800"/>
+            <a:ext cx="1097280" cy="1097280"/>
+          </a:xfrm>
+          <a:prstGeom prst="ellipse">
+            <a:avLst/>
+          </a:prstGeom>
+          <a:solidFill>
+            <a:srgbClr val="FFFFFF"/>
+          </a:solidFill>
+          <a:ln>
+            <a:noFill/>
+          </a:ln>
+          <a:effectLst/>
+        </p:spPr>
+        <p:style>
+          <a:lnRef idx="1">
+            <a:schemeClr val="accent1"/>
+          </a:lnRef>
+          <a:fillRef idx="3">
+            <a:schemeClr val="accent1"/>
+          </a:fillRef>
+          <a:effectRef idx="2">
+            <a:schemeClr val="accent1"/>
+          </a:effectRef>
+          <a:fontRef idx="minor">
+            <a:schemeClr val="lt1"/>
+          </a:fontRef>
+        </p:style>
+        <p:txBody>
+          <a:bodyPr rtlCol="0" anchor="ctr"/>
+          <a:lstStyle/>
+          <a:p>
+            <a:pPr algn="ctr"/>
+          </a:p>
+        </p:txBody>
+      </p:sp>
+      <p:sp>
+        <p:nvSpPr>
           <p:cNvPr id="5" name="TextBox 4"/>
           <p:cNvSpPr txBox="1"/>
           <p:nvPr/>
         </p:nvSpPr>
         <p:spPr>
           <a:xfrm>
-            <a:off x="804672" y="3886200"/>
-            <a:ext cx="10515600" cy="2194560"/>
+            <a:off x="9966960" y="685800"/>
+            <a:ext cx="1097280" cy="1097280"/>
           </a:xfrm>
           <a:prstGeom prst="rect">
             <a:avLst/>
@@ -3233,6 +3242,41 @@
           <a:noFill/>
         </p:spPr>
         <p:txBody>
+          <a:bodyPr wrap="none" anchor="ctr">
+            <a:spAutoFit/>
+          </a:bodyPr>
+          <a:lstStyle/>
+          <a:p>
+            <a:pPr algn="ctr"/>
+            <a:r>
+              <a:rPr sz="3600" b="1">
+                <a:solidFill>
+                  <a:srgbClr val="8A3A6B"/>
+                </a:solidFill>
+                <a:latin typeface="Verdana"/>
+              </a:rPr>
+              <a:t>RF</a:t>
+            </a:r>
+          </a:p>
+        </p:txBody>
+      </p:sp>
+      <p:sp>
+        <p:nvSpPr>
+          <p:cNvPr id="6" name="TextBox 5"/>
+          <p:cNvSpPr txBox="1"/>
+          <p:nvPr/>
+        </p:nvSpPr>
+        <p:spPr>
+          <a:xfrm>
+            <a:off x="868680" y="1737360"/>
+            <a:ext cx="8961120" cy="2011680"/>
+          </a:xfrm>
+          <a:prstGeom prst="rect">
+            <a:avLst/>
+          </a:prstGeom>
+          <a:noFill/>
+        </p:spPr>
+        <p:txBody>
           <a:bodyPr wrap="square" anchor="t">
             <a:spAutoFit/>
           </a:bodyPr>
@@ -3240,33 +3284,79 @@
           <a:p>
             <a:pPr algn="l"/>
             <a:r>
-              <a:rPr sz="1800" b="0">
-                <a:solidFill>
-                  <a:srgbClr val="9AA6A2"/>
+              <a:rPr sz="3400" b="1" i="0">
+                <a:solidFill>
+                  <a:srgbClr val="FFFFFF"/>
+                </a:solidFill>
+                <a:latin typeface="Verdana"/>
+              </a:rPr>
+              <a:t>Retail Footfall and Inventory Monitoring</a:t>
+            </a:r>
+          </a:p>
+        </p:txBody>
+      </p:sp>
+      <p:sp>
+        <p:nvSpPr>
+          <p:cNvPr id="7" name="TextBox 6"/>
+          <p:cNvSpPr txBox="1"/>
+          <p:nvPr/>
+        </p:nvSpPr>
+        <p:spPr>
+          <a:xfrm>
+            <a:off x="868680" y="3794760"/>
+            <a:ext cx="8686800" cy="640080"/>
+          </a:xfrm>
+          <a:prstGeom prst="rect">
+            <a:avLst/>
+          </a:prstGeom>
+          <a:noFill/>
+        </p:spPr>
+        <p:txBody>
+          <a:bodyPr wrap="square" anchor="t">
+            <a:spAutoFit/>
+          </a:bodyPr>
+          <a:lstStyle/>
+          <a:p>
+            <a:pPr algn="l"/>
+            <a:r>
+              <a:rPr sz="1700" b="0" i="1">
+                <a:solidFill>
+                  <a:srgbClr val="E7D7E1"/>
                 </a:solidFill>
                 <a:latin typeface="Calibri"/>
               </a:rPr>
               <a:t>Two stores, ten sensors, one live edge-to-cloud pipeline</a:t>
             </a:r>
           </a:p>
+        </p:txBody>
+      </p:sp>
+      <p:sp>
+        <p:nvSpPr>
+          <p:cNvPr id="8" name="TextBox 7"/>
+          <p:cNvSpPr txBox="1"/>
+          <p:nvPr/>
+        </p:nvSpPr>
+        <p:spPr>
+          <a:xfrm>
+            <a:off x="868680" y="4709160"/>
+            <a:ext cx="8229600" cy="1463040"/>
+          </a:xfrm>
+          <a:prstGeom prst="rect">
+            <a:avLst/>
+          </a:prstGeom>
+          <a:noFill/>
+        </p:spPr>
+        <p:txBody>
+          <a:bodyPr wrap="square" anchor="t">
+            <a:spAutoFit/>
+          </a:bodyPr>
+          <a:lstStyle/>
           <a:p>
             <a:pPr algn="l"/>
             <a:r>
-              <a:rPr sz="1600" b="1">
-                <a:solidFill>
-                  <a:srgbClr val="E6EBE8"/>
-                </a:solidFill>
-                <a:latin typeface="Calibri"/>
-              </a:rPr>
-              <a:t/>
-            </a:r>
-          </a:p>
-          <a:p>
-            <a:pPr algn="l"/>
-            <a:r>
-              <a:rPr sz="1300" b="0">
-                <a:solidFill>
-                  <a:srgbClr val="9AA6A2"/>
+              <a:rPr sz="1250" b="0" i="0">
+                <a:solidFill>
+                  <a:srgbClr val="E9DBE4"/>
                 </a:solidFill>
                 <a:latin typeface="Calibri"/>
               </a:rPr>
@@ -3276,9 +3366,9 @@
           <a:p>
             <a:pPr algn="l"/>
             <a:r>
-              <a:rPr sz="1300" b="0">
-                <a:solidFill>
-                  <a:srgbClr val="9AA6A2"/>
+              <a:rPr sz="1250" b="0" i="0">
+                <a:solidFill>
+                  <a:srgbClr val="E9DBE4"/>
                 </a:solidFill>
                 <a:latin typeface="Calibri"/>
               </a:rPr>

--- a/ppt/retail-footfall-inventory.pptx
+++ b/ppt/retail-footfall-inventory.pptx
@@ -3183,58 +3183,14 @@
       </p:sp>
       <p:sp>
         <p:nvSpPr>
-          <p:cNvPr id="4" name="Oval 3"/>
-          <p:cNvSpPr/>
+          <p:cNvPr id="4" name="TextBox 3"/>
+          <p:cNvSpPr txBox="1"/>
           <p:nvPr/>
         </p:nvSpPr>
         <p:spPr>
           <a:xfrm>
-            <a:off x="9966960" y="685800"/>
-            <a:ext cx="1097280" cy="1097280"/>
-          </a:xfrm>
-          <a:prstGeom prst="ellipse">
-            <a:avLst/>
-          </a:prstGeom>
-          <a:solidFill>
-            <a:srgbClr val="FFFFFF"/>
-          </a:solidFill>
-          <a:ln>
-            <a:noFill/>
-          </a:ln>
-          <a:effectLst/>
-        </p:spPr>
-        <p:style>
-          <a:lnRef idx="1">
-            <a:schemeClr val="accent1"/>
-          </a:lnRef>
-          <a:fillRef idx="3">
-            <a:schemeClr val="accent1"/>
-          </a:fillRef>
-          <a:effectRef idx="2">
-            <a:schemeClr val="accent1"/>
-          </a:effectRef>
-          <a:fontRef idx="minor">
-            <a:schemeClr val="lt1"/>
-          </a:fontRef>
-        </p:style>
-        <p:txBody>
-          <a:bodyPr rtlCol="0" anchor="ctr"/>
-          <a:lstStyle/>
-          <a:p>
-            <a:pPr algn="ctr"/>
-          </a:p>
-        </p:txBody>
-      </p:sp>
-      <p:sp>
-        <p:nvSpPr>
-          <p:cNvPr id="5" name="TextBox 4"/>
-          <p:cNvSpPr txBox="1"/>
-          <p:nvPr/>
-        </p:nvSpPr>
-        <p:spPr>
-          <a:xfrm>
-            <a:off x="9966960" y="685800"/>
-            <a:ext cx="1097280" cy="1097280"/>
+            <a:off x="868680" y="1691640"/>
+            <a:ext cx="10332720" cy="2011680"/>
           </a:xfrm>
           <a:prstGeom prst="rect">
             <a:avLst/>
@@ -3242,41 +3198,6 @@
           <a:noFill/>
         </p:spPr>
         <p:txBody>
-          <a:bodyPr wrap="none" anchor="ctr">
-            <a:spAutoFit/>
-          </a:bodyPr>
-          <a:lstStyle/>
-          <a:p>
-            <a:pPr algn="ctr"/>
-            <a:r>
-              <a:rPr sz="3600" b="1">
-                <a:solidFill>
-                  <a:srgbClr val="8A3A6B"/>
-                </a:solidFill>
-                <a:latin typeface="Verdana"/>
-              </a:rPr>
-              <a:t>RF</a:t>
-            </a:r>
-          </a:p>
-        </p:txBody>
-      </p:sp>
-      <p:sp>
-        <p:nvSpPr>
-          <p:cNvPr id="6" name="TextBox 5"/>
-          <p:cNvSpPr txBox="1"/>
-          <p:nvPr/>
-        </p:nvSpPr>
-        <p:spPr>
-          <a:xfrm>
-            <a:off x="868680" y="1737360"/>
-            <a:ext cx="8961120" cy="2011680"/>
-          </a:xfrm>
-          <a:prstGeom prst="rect">
-            <a:avLst/>
-          </a:prstGeom>
-          <a:noFill/>
-        </p:spPr>
-        <p:txBody>
           <a:bodyPr wrap="square" anchor="t">
             <a:spAutoFit/>
           </a:bodyPr>
@@ -3297,7 +3218,7 @@
       </p:sp>
       <p:sp>
         <p:nvSpPr>
-          <p:cNvPr id="7" name="TextBox 6"/>
+          <p:cNvPr id="5" name="TextBox 4"/>
           <p:cNvSpPr txBox="1"/>
           <p:nvPr/>
         </p:nvSpPr>
@@ -3332,7 +3253,7 @@
       </p:sp>
       <p:sp>
         <p:nvSpPr>
-          <p:cNvPr id="8" name="TextBox 7"/>
+          <p:cNvPr id="6" name="TextBox 5"/>
           <p:cNvSpPr txBox="1"/>
           <p:nvPr/>
         </p:nvSpPr>

--- a/ppt/retail-footfall-inventory.pptx
+++ b/ppt/retail-footfall-inventory.pptx
@@ -3318,20 +3318,204 @@
       <p:grpSpPr/>
       <p:sp>
         <p:nvSpPr>
+          <p:cNvPr id="2" name="Title 1"/>
+          <p:cNvSpPr>
+            <a:spLocks noGrp="1"/>
+          </p:cNvSpPr>
+          <p:nvPr>
+            <p:ph type="title"/>
+          </p:nvPr>
+        </p:nvSpPr>
+        <p:spPr>
+          <a:xfrm>
+            <a:off x="640080" y="384048"/>
+            <a:ext cx="10972800" cy="868680"/>
+          </a:xfrm>
+        </p:spPr>
+        <p:txBody>
+          <a:bodyPr wrap="square" anchor="t"/>
+          <a:lstStyle/>
+          <a:p>
+            <a:pPr algn="l"/>
+            <a:r>
+              <a:rPr b="1" sz="2700">
+                <a:solidFill>
+                  <a:srgbClr val="8A3A6B"/>
+                </a:solidFill>
+                <a:latin typeface="Verdana"/>
+              </a:rPr>
+              <a:t>Why periodic checking fails</a:t>
+            </a:r>
+          </a:p>
+        </p:txBody>
+      </p:sp>
+      <p:sp>
+        <p:nvSpPr>
+          <p:cNvPr id="3" name="Content Placeholder 2"/>
+          <p:cNvSpPr>
+            <a:spLocks noGrp="1"/>
+          </p:cNvSpPr>
+          <p:nvPr>
+            <p:ph idx="1"/>
+          </p:nvPr>
+        </p:nvSpPr>
+        <p:spPr>
+          <a:xfrm>
+            <a:off x="658368" y="1481328"/>
+            <a:ext cx="10972800" cy="4846320"/>
+          </a:xfrm>
+        </p:spPr>
+        <p:txBody>
+          <a:bodyPr wrap="square">
+            <a:normAutofit/>
+          </a:bodyPr>
+          <a:lstStyle/>
+          <a:p>
+            <a:pPr>
+              <a:spcAft>
+                <a:spcPts val="600"/>
+              </a:spcAft>
+            </a:pPr>
+            <a:r>
+              <a:rPr sz="1500" b="1">
+                <a:solidFill>
+                  <a:srgbClr val="8A3A6B"/>
+                </a:solidFill>
+                <a:latin typeface="Calibri"/>
+              </a:rPr>
+              <a:t>Periodic, manual checks</a:t>
+            </a:r>
+          </a:p>
+          <a:p>
+            <a:pPr lvl="1">
+              <a:spcAft>
+                <a:spcPts val="600"/>
+              </a:spcAft>
+            </a:pPr>
+            <a:r>
+              <a:rPr sz="1300" b="0">
+                <a:solidFill>
+                  <a:srgbClr val="232A26"/>
+                </a:solidFill>
+                <a:latin typeface="Calibri"/>
+              </a:rPr>
+              <a:t>Empty shelves sit unnoticed between stock walks, and sales are lost silently</a:t>
+            </a:r>
+          </a:p>
+          <a:p>
+            <a:pPr lvl="1">
+              <a:spcAft>
+                <a:spcPts val="600"/>
+              </a:spcAft>
+            </a:pPr>
+            <a:r>
+              <a:rPr sz="1300" b="0">
+                <a:solidFill>
+                  <a:srgbClr val="232A26"/>
+                </a:solidFill>
+                <a:latin typeface="Calibri"/>
+              </a:rPr>
+              <a:t>A fridge drifting warm between rounds puts the whole cold chain at risk</a:t>
+            </a:r>
+          </a:p>
+          <a:p>
+            <a:pPr lvl="1">
+              <a:spcAft>
+                <a:spcPts val="600"/>
+              </a:spcAft>
+            </a:pPr>
+            <a:r>
+              <a:rPr sz="1300" b="0">
+                <a:solidFill>
+                  <a:srgbClr val="232A26"/>
+                </a:solidFill>
+                <a:latin typeface="Calibri"/>
+              </a:rPr>
+              <a:t>Checkout queues build in minutes; by the next walk-through, customers are already gone</a:t>
+            </a:r>
+          </a:p>
+          <a:p>
+            <a:pPr>
+              <a:spcAft>
+                <a:spcPts val="600"/>
+              </a:spcAft>
+            </a:pPr>
+            <a:r>
+              <a:rPr sz="1500" b="1">
+                <a:solidFill>
+                  <a:srgbClr val="8A3A6B"/>
+                </a:solidFill>
+                <a:latin typeface="Calibri"/>
+              </a:rPr>
+              <a:t>Continuous edge monitoring</a:t>
+            </a:r>
+          </a:p>
+          <a:p>
+            <a:pPr lvl="1">
+              <a:spcAft>
+                <a:spcPts val="600"/>
+              </a:spcAft>
+            </a:pPr>
+            <a:r>
+              <a:rPr sz="1300" b="0">
+                <a:solidFill>
+                  <a:srgbClr val="232A26"/>
+                </a:solidFill>
+                <a:latin typeface="Calibri"/>
+              </a:rPr>
+              <a:t>Ten sensors across two stores: footfall, shelf stock, fridge temperature, queue length, energy draw</a:t>
+            </a:r>
+          </a:p>
+          <a:p>
+            <a:pPr lvl="1">
+              <a:spcAft>
+                <a:spcPts val="600"/>
+              </a:spcAft>
+            </a:pPr>
+            <a:r>
+              <a:rPr sz="1300" b="0">
+                <a:solidFill>
+                  <a:srgbClr val="232A26"/>
+                </a:solidFill>
+                <a:latin typeface="Calibri"/>
+              </a:rPr>
+              <a:t>A fog gateway windows and aggregates readings right beside the shop floor</a:t>
+            </a:r>
+          </a:p>
+          <a:p>
+            <a:pPr lvl="1">
+              <a:spcAft>
+                <a:spcPts val="600"/>
+              </a:spcAft>
+            </a:pPr>
+            <a:r>
+              <a:rPr sz="1300" b="0">
+                <a:solidFill>
+                  <a:srgbClr val="232A26"/>
+                </a:solidFill>
+                <a:latin typeface="Calibri"/>
+              </a:rPr>
+              <a:t>Four retail-health rules raise an alert the moment a window crosses its threshold</a:t>
+            </a:r>
+          </a:p>
+        </p:txBody>
+      </p:sp>
+      <p:sp>
+        <p:nvSpPr>
           <p:cNvPr id="4" name="Rectangle 3"/>
           <p:cNvSpPr/>
           <p:nvPr/>
         </p:nvSpPr>
         <p:spPr>
           <a:xfrm>
-            <a:off x="-45720" y="-45720"/>
-            <a:ext cx="12344400" cy="6949440"/>
+            <a:off x="658368" y="1261872"/>
+            <a:ext cx="3108960" cy="36576"/>
           </a:xfrm>
           <a:prstGeom prst="rect">
             <a:avLst/>
           </a:prstGeom>
           <a:solidFill>
-            <a:srgbClr val="1B2024"/>
+            <a:srgbClr val="8A3A6B"/>
           </a:solidFill>
           <a:ln>
             <a:noFill/>
@@ -3360,6 +3544,24 @@
           </a:p>
         </p:txBody>
       </p:sp>
+    </p:spTree>
+  </p:cSld>
+  <p:clrMapOvr>
+    <a:masterClrMapping/>
+  </p:clrMapOvr>
+</p:sld>
+</file>
+
+<file path=ppt/slides/slide3.xml><?xml version="1.0" encoding="utf-8"?>
+<p:sld xmlns:a="http://schemas.openxmlformats.org/drawingml/2006/main" xmlns:p="http://schemas.openxmlformats.org/presentationml/2006/main" xmlns:r="http://schemas.openxmlformats.org/officeDocument/2006/relationships">
+  <p:cSld>
+    <p:spTree>
+      <p:nvGrpSpPr>
+        <p:cNvPr id="1" name=""/>
+        <p:cNvGrpSpPr/>
+        <p:nvPr/>
+      </p:nvGrpSpPr>
+      <p:grpSpPr/>
       <p:sp>
         <p:nvSpPr>
           <p:cNvPr id="2" name="Title 1"/>
@@ -3384,11 +3586,11 @@
             <a:r>
               <a:rPr b="1" sz="2700">
                 <a:solidFill>
-                  <a:srgbClr val="BB8CA9"/>
+                  <a:srgbClr val="8A3A6B"/>
                 </a:solidFill>
                 <a:latin typeface="Verdana"/>
               </a:rPr>
-              <a:t>Why periodic checking fails</a:t>
+              <a:t>How it works</a:t>
             </a:r>
           </a:p>
         </p:txBody>
@@ -3417,136 +3619,120 @@
           <a:p>
             <a:pPr>
               <a:spcAft>
-                <a:spcPts val="600"/>
+                <a:spcPts val="900"/>
               </a:spcAft>
             </a:pPr>
             <a:r>
-              <a:rPr sz="1500" b="1">
-                <a:solidFill>
-                  <a:srgbClr val="BB8CA9"/>
+              <a:rPr sz="1700" b="0">
+                <a:solidFill>
+                  <a:srgbClr val="232A26"/>
                 </a:solidFill>
                 <a:latin typeface="Calibri"/>
               </a:rPr>
-              <a:t>Periodic, manual checks</a:t>
-            </a:r>
-          </a:p>
-          <a:p>
-            <a:pPr lvl="1">
+              <a:t>Store sensors: 5 metrics x 2 stores, sampled every few seconds</a:t>
+            </a:r>
+          </a:p>
+          <a:p>
+            <a:pPr>
               <a:spcAft>
-                <a:spcPts val="600"/>
+                <a:spcPts val="900"/>
               </a:spcAft>
             </a:pPr>
             <a:r>
-              <a:rPr sz="1300" b="0">
-                <a:solidFill>
-                  <a:srgbClr val="E6EBE8"/>
+              <a:rPr sz="1700" b="0">
+                <a:solidFill>
+                  <a:srgbClr val="232A26"/>
                 </a:solidFill>
                 <a:latin typeface="Calibri"/>
               </a:rPr>
-              <a:t>Empty shelves sit unnoticed between stock walks, and sales are lost silently</a:t>
-            </a:r>
-          </a:p>
-          <a:p>
-            <a:pPr lvl="1">
+              <a:t>Fog gateway: windows, aggregates, and evaluates alert rules</a:t>
+            </a:r>
+          </a:p>
+          <a:p>
+            <a:pPr>
               <a:spcAft>
-                <a:spcPts val="600"/>
+                <a:spcPts val="900"/>
               </a:spcAft>
             </a:pPr>
             <a:r>
-              <a:rPr sz="1300" b="0">
-                <a:solidFill>
-                  <a:srgbClr val="E6EBE8"/>
+              <a:rPr sz="1700" b="0">
+                <a:solidFill>
+                  <a:srgbClr val="232A26"/>
                 </a:solidFill>
                 <a:latin typeface="Calibri"/>
               </a:rPr>
-              <a:t>A fridge drifting warm between rounds puts the whole cold chain at risk</a:t>
-            </a:r>
-          </a:p>
-          <a:p>
-            <a:pPr lvl="1">
+              <a:t>Amazon SQS: one aggregate per window on the queue</a:t>
+            </a:r>
+          </a:p>
+          <a:p>
+            <a:pPr>
               <a:spcAft>
-                <a:spcPts val="600"/>
+                <a:spcPts val="900"/>
               </a:spcAft>
             </a:pPr>
             <a:r>
-              <a:rPr sz="1300" b="0">
-                <a:solidFill>
-                  <a:srgbClr val="E6EBE8"/>
+              <a:rPr sz="1700" b="0">
+                <a:solidFill>
+                  <a:srgbClr val="232A26"/>
                 </a:solidFill>
                 <a:latin typeface="Calibri"/>
               </a:rPr>
-              <a:t>Checkout queues build in minutes; by the next walk-through, customers are already gone</a:t>
+              <a:t>AWS Lambda: serverless ingest of each batch</a:t>
             </a:r>
           </a:p>
           <a:p>
             <a:pPr>
               <a:spcAft>
-                <a:spcPts val="600"/>
+                <a:spcPts val="900"/>
               </a:spcAft>
             </a:pPr>
             <a:r>
-              <a:rPr sz="1500" b="1">
-                <a:solidFill>
-                  <a:srgbClr val="BB8CA9"/>
+              <a:rPr sz="1700" b="0">
+                <a:solidFill>
+                  <a:srgbClr val="232A26"/>
                 </a:solidFill>
                 <a:latin typeface="Calibri"/>
               </a:rPr>
-              <a:t>Continuous edge monitoring</a:t>
-            </a:r>
-          </a:p>
-          <a:p>
-            <a:pPr lvl="1">
+              <a:t>Amazon DynamoDB: durable store of aggregates</a:t>
+            </a:r>
+          </a:p>
+          <a:p>
+            <a:pPr>
               <a:spcAft>
-                <a:spcPts val="600"/>
+                <a:spcPts val="900"/>
               </a:spcAft>
             </a:pPr>
             <a:r>
-              <a:rPr sz="1300" b="0">
-                <a:solidFill>
-                  <a:srgbClr val="E6EBE8"/>
+              <a:rPr sz="1700" b="0">
+                <a:solidFill>
+                  <a:srgbClr val="232A26"/>
                 </a:solidFill>
                 <a:latin typeface="Calibri"/>
               </a:rPr>
-              <a:t>Ten sensors across two stores: footfall, shelf stock, fridge temperature, queue length, energy draw</a:t>
-            </a:r>
-          </a:p>
-          <a:p>
-            <a:pPr lvl="1">
+              <a:t>Live dashboard: Amazon S3 and API Gateway</a:t>
+            </a:r>
+          </a:p>
+          <a:p>
+            <a:pPr>
               <a:spcAft>
-                <a:spcPts val="600"/>
+                <a:spcPts val="900"/>
               </a:spcAft>
             </a:pPr>
             <a:r>
-              <a:rPr sz="1300" b="0">
-                <a:solidFill>
-                  <a:srgbClr val="E6EBE8"/>
+              <a:rPr sz="1700" b="1">
+                <a:solidFill>
+                  <a:srgbClr val="8A3A6B"/>
                 </a:solidFill>
                 <a:latin typeface="Calibri"/>
               </a:rPr>
-              <a:t>A fog gateway windows and aggregates readings right beside the shop floor</a:t>
-            </a:r>
-          </a:p>
-          <a:p>
-            <a:pPr lvl="1">
-              <a:spcAft>
-                <a:spcPts val="600"/>
-              </a:spcAft>
-            </a:pPr>
-            <a:r>
-              <a:rPr sz="1300" b="0">
-                <a:solidFill>
-                  <a:srgbClr val="E6EBE8"/>
-                </a:solidFill>
-                <a:latin typeface="Calibri"/>
-              </a:rPr>
-              <a:t>Four retail-health rules raise an alert the moment a window crosses its threshold</a:t>
-            </a:r>
-          </a:p>
-        </p:txBody>
-      </p:sp>
-      <p:sp>
-        <p:nvSpPr>
-          <p:cNvPr id="5" name="Rectangle 4"/>
+              <a:t>Verified end-to-end locally with Docker and an AWS emulator, deploys to real AWS with a single scripted step</a:t>
+            </a:r>
+          </a:p>
+        </p:txBody>
+      </p:sp>
+      <p:sp>
+        <p:nvSpPr>
+          <p:cNvPr id="4" name="Rectangle 3"/>
           <p:cNvSpPr/>
           <p:nvPr/>
         </p:nvSpPr>
@@ -3559,7 +3745,7 @@
             <a:avLst/>
           </a:prstGeom>
           <a:solidFill>
-            <a:srgbClr val="BB8CA9"/>
+            <a:srgbClr val="8A3A6B"/>
           </a:solidFill>
           <a:ln>
             <a:noFill/>
@@ -3596,7 +3782,7 @@
 </p:sld>
 </file>
 
-<file path=ppt/slides/slide3.xml><?xml version="1.0" encoding="utf-8"?>
+<file path=ppt/slides/slide4.xml><?xml version="1.0" encoding="utf-8"?>
 <p:sld xmlns:a="http://schemas.openxmlformats.org/drawingml/2006/main" xmlns:p="http://schemas.openxmlformats.org/presentationml/2006/main" xmlns:r="http://schemas.openxmlformats.org/officeDocument/2006/relationships">
   <p:cSld>
     <p:spTree>
@@ -3608,20 +3794,140 @@
       <p:grpSpPr/>
       <p:sp>
         <p:nvSpPr>
+          <p:cNvPr id="2" name="Title 1"/>
+          <p:cNvSpPr>
+            <a:spLocks noGrp="1"/>
+          </p:cNvSpPr>
+          <p:nvPr>
+            <p:ph type="title"/>
+          </p:nvPr>
+        </p:nvSpPr>
+        <p:spPr>
+          <a:xfrm>
+            <a:off x="640080" y="384048"/>
+            <a:ext cx="10972800" cy="868680"/>
+          </a:xfrm>
+        </p:spPr>
+        <p:txBody>
+          <a:bodyPr wrap="square" anchor="t"/>
+          <a:lstStyle/>
+          <a:p>
+            <a:pPr algn="l"/>
+            <a:r>
+              <a:rPr b="1" sz="2700">
+                <a:solidFill>
+                  <a:srgbClr val="8A3A6B"/>
+                </a:solidFill>
+                <a:latin typeface="Verdana"/>
+              </a:rPr>
+              <a:t>Demonstration highlights</a:t>
+            </a:r>
+          </a:p>
+        </p:txBody>
+      </p:sp>
+      <p:sp>
+        <p:nvSpPr>
+          <p:cNvPr id="3" name="Content Placeholder 2"/>
+          <p:cNvSpPr>
+            <a:spLocks noGrp="1"/>
+          </p:cNvSpPr>
+          <p:nvPr>
+            <p:ph idx="1"/>
+          </p:nvPr>
+        </p:nvSpPr>
+        <p:spPr>
+          <a:xfrm>
+            <a:off x="658368" y="1481328"/>
+            <a:ext cx="5760720" cy="4754880"/>
+          </a:xfrm>
+        </p:spPr>
+        <p:txBody>
+          <a:bodyPr wrap="square">
+            <a:normAutofit/>
+          </a:bodyPr>
+          <a:lstStyle/>
+          <a:p>
+            <a:pPr>
+              <a:spcAft>
+                <a:spcPts val="800"/>
+              </a:spcAft>
+            </a:pPr>
+            <a:r>
+              <a:rPr sz="1500" b="0">
+                <a:solidFill>
+                  <a:srgbClr val="232A26"/>
+                </a:solidFill>
+                <a:latin typeface="Calibri"/>
+              </a:rPr>
+              <a:t>The live dashboard during the local end-to-end run, all four health checks green (top right)</a:t>
+            </a:r>
+          </a:p>
+          <a:p>
+            <a:pPr>
+              <a:spcAft>
+                <a:spcPts val="800"/>
+              </a:spcAft>
+            </a:pPr>
+            <a:r>
+              <a:rPr sz="1500" b="1">
+                <a:solidFill>
+                  <a:srgbClr val="8A3A6B"/>
+                </a:solidFill>
+                <a:latin typeface="Calibri"/>
+              </a:rPr>
+              <a:t>4 / 4 pipeline health checks green: gateway, queue, Lambda, and end-to-end freshness</a:t>
+            </a:r>
+          </a:p>
+          <a:p>
+            <a:pPr>
+              <a:spcAft>
+                <a:spcPts val="800"/>
+              </a:spcAft>
+            </a:pPr>
+            <a:r>
+              <a:rPr sz="1500" b="0">
+                <a:solidFill>
+                  <a:srgbClr val="232A26"/>
+                </a:solidFill>
+                <a:latin typeface="Calibri"/>
+              </a:rPr>
+              <a:t>118 automated JUnit tests pass across the sensor, fog, processor, and dashboard modules</a:t>
+            </a:r>
+          </a:p>
+          <a:p>
+            <a:pPr>
+              <a:spcAft>
+                <a:spcPts val="800"/>
+              </a:spcAft>
+            </a:pPr>
+            <a:r>
+              <a:rPr sz="1500" b="0">
+                <a:solidFill>
+                  <a:srgbClr val="232A26"/>
+                </a:solidFill>
+                <a:latin typeface="Calibri"/>
+              </a:rPr>
+              <a:t>2,000 messages pushed through in a burst load test by 32 parallel workers</a:t>
+            </a:r>
+          </a:p>
+        </p:txBody>
+      </p:sp>
+      <p:sp>
+        <p:nvSpPr>
           <p:cNvPr id="4" name="Rectangle 3"/>
           <p:cNvSpPr/>
           <p:nvPr/>
         </p:nvSpPr>
         <p:spPr>
           <a:xfrm>
-            <a:off x="-45720" y="-45720"/>
-            <a:ext cx="12344400" cy="6949440"/>
+            <a:off x="658368" y="1261872"/>
+            <a:ext cx="3108960" cy="36576"/>
           </a:xfrm>
           <a:prstGeom prst="rect">
             <a:avLst/>
           </a:prstGeom>
           <a:solidFill>
-            <a:srgbClr val="1B2024"/>
+            <a:srgbClr val="8A3A6B"/>
           </a:solidFill>
           <a:ln>
             <a:noFill/>
@@ -3650,447 +3956,9 @@
           </a:p>
         </p:txBody>
       </p:sp>
-      <p:sp>
-        <p:nvSpPr>
-          <p:cNvPr id="2" name="Title 1"/>
-          <p:cNvSpPr>
-            <a:spLocks noGrp="1"/>
-          </p:cNvSpPr>
-          <p:nvPr>
-            <p:ph type="title"/>
-          </p:nvPr>
-        </p:nvSpPr>
-        <p:spPr>
-          <a:xfrm>
-            <a:off x="640080" y="384048"/>
-            <a:ext cx="10972800" cy="868680"/>
-          </a:xfrm>
-        </p:spPr>
-        <p:txBody>
-          <a:bodyPr wrap="square" anchor="t"/>
-          <a:lstStyle/>
-          <a:p>
-            <a:pPr algn="l"/>
-            <a:r>
-              <a:rPr b="1" sz="2700">
-                <a:solidFill>
-                  <a:srgbClr val="BB8CA9"/>
-                </a:solidFill>
-                <a:latin typeface="Verdana"/>
-              </a:rPr>
-              <a:t>How it works</a:t>
-            </a:r>
-          </a:p>
-        </p:txBody>
-      </p:sp>
-      <p:sp>
-        <p:nvSpPr>
-          <p:cNvPr id="3" name="Content Placeholder 2"/>
-          <p:cNvSpPr>
-            <a:spLocks noGrp="1"/>
-          </p:cNvSpPr>
-          <p:nvPr>
-            <p:ph idx="1"/>
-          </p:nvPr>
-        </p:nvSpPr>
-        <p:spPr>
-          <a:xfrm>
-            <a:off x="658368" y="1481328"/>
-            <a:ext cx="10972800" cy="4846320"/>
-          </a:xfrm>
-        </p:spPr>
-        <p:txBody>
-          <a:bodyPr wrap="square">
-            <a:normAutofit/>
-          </a:bodyPr>
-          <a:lstStyle/>
-          <a:p>
-            <a:pPr>
-              <a:spcAft>
-                <a:spcPts val="900"/>
-              </a:spcAft>
-            </a:pPr>
-            <a:r>
-              <a:rPr sz="1700" b="0">
-                <a:solidFill>
-                  <a:srgbClr val="E6EBE8"/>
-                </a:solidFill>
-                <a:latin typeface="Calibri"/>
-              </a:rPr>
-              <a:t>Store sensors: 5 metrics x 2 stores, sampled every few seconds</a:t>
-            </a:r>
-          </a:p>
-          <a:p>
-            <a:pPr>
-              <a:spcAft>
-                <a:spcPts val="900"/>
-              </a:spcAft>
-            </a:pPr>
-            <a:r>
-              <a:rPr sz="1700" b="0">
-                <a:solidFill>
-                  <a:srgbClr val="E6EBE8"/>
-                </a:solidFill>
-                <a:latin typeface="Calibri"/>
-              </a:rPr>
-              <a:t>Fog gateway: windows, aggregates, and evaluates alert rules</a:t>
-            </a:r>
-          </a:p>
-          <a:p>
-            <a:pPr>
-              <a:spcAft>
-                <a:spcPts val="900"/>
-              </a:spcAft>
-            </a:pPr>
-            <a:r>
-              <a:rPr sz="1700" b="0">
-                <a:solidFill>
-                  <a:srgbClr val="E6EBE8"/>
-                </a:solidFill>
-                <a:latin typeface="Calibri"/>
-              </a:rPr>
-              <a:t>Amazon SQS: one aggregate per window on the queue</a:t>
-            </a:r>
-          </a:p>
-          <a:p>
-            <a:pPr>
-              <a:spcAft>
-                <a:spcPts val="900"/>
-              </a:spcAft>
-            </a:pPr>
-            <a:r>
-              <a:rPr sz="1700" b="0">
-                <a:solidFill>
-                  <a:srgbClr val="E6EBE8"/>
-                </a:solidFill>
-                <a:latin typeface="Calibri"/>
-              </a:rPr>
-              <a:t>AWS Lambda: serverless ingest of each batch</a:t>
-            </a:r>
-          </a:p>
-          <a:p>
-            <a:pPr>
-              <a:spcAft>
-                <a:spcPts val="900"/>
-              </a:spcAft>
-            </a:pPr>
-            <a:r>
-              <a:rPr sz="1700" b="0">
-                <a:solidFill>
-                  <a:srgbClr val="E6EBE8"/>
-                </a:solidFill>
-                <a:latin typeface="Calibri"/>
-              </a:rPr>
-              <a:t>Amazon DynamoDB: durable store of aggregates</a:t>
-            </a:r>
-          </a:p>
-          <a:p>
-            <a:pPr>
-              <a:spcAft>
-                <a:spcPts val="900"/>
-              </a:spcAft>
-            </a:pPr>
-            <a:r>
-              <a:rPr sz="1700" b="0">
-                <a:solidFill>
-                  <a:srgbClr val="E6EBE8"/>
-                </a:solidFill>
-                <a:latin typeface="Calibri"/>
-              </a:rPr>
-              <a:t>Live dashboard: Amazon S3 and API Gateway</a:t>
-            </a:r>
-          </a:p>
-          <a:p>
-            <a:pPr>
-              <a:spcAft>
-                <a:spcPts val="900"/>
-              </a:spcAft>
-            </a:pPr>
-            <a:r>
-              <a:rPr sz="1700" b="1">
-                <a:solidFill>
-                  <a:srgbClr val="BB8CA9"/>
-                </a:solidFill>
-                <a:latin typeface="Calibri"/>
-              </a:rPr>
-              <a:t>Verified end-to-end locally with Docker and an AWS emulator, deploys to real AWS with a single scripted step</a:t>
-            </a:r>
-          </a:p>
-        </p:txBody>
-      </p:sp>
-      <p:sp>
-        <p:nvSpPr>
-          <p:cNvPr id="5" name="Rectangle 4"/>
-          <p:cNvSpPr/>
-          <p:nvPr/>
-        </p:nvSpPr>
-        <p:spPr>
-          <a:xfrm>
-            <a:off x="658368" y="1261872"/>
-            <a:ext cx="3108960" cy="36576"/>
-          </a:xfrm>
-          <a:prstGeom prst="rect">
-            <a:avLst/>
-          </a:prstGeom>
-          <a:solidFill>
-            <a:srgbClr val="BB8CA9"/>
-          </a:solidFill>
-          <a:ln>
-            <a:noFill/>
-          </a:ln>
-          <a:effectLst/>
-        </p:spPr>
-        <p:style>
-          <a:lnRef idx="1">
-            <a:schemeClr val="accent1"/>
-          </a:lnRef>
-          <a:fillRef idx="3">
-            <a:schemeClr val="accent1"/>
-          </a:fillRef>
-          <a:effectRef idx="2">
-            <a:schemeClr val="accent1"/>
-          </a:effectRef>
-          <a:fontRef idx="minor">
-            <a:schemeClr val="lt1"/>
-          </a:fontRef>
-        </p:style>
-        <p:txBody>
-          <a:bodyPr rtlCol="0" anchor="ctr"/>
-          <a:lstStyle/>
-          <a:p>
-            <a:pPr algn="ctr"/>
-          </a:p>
-        </p:txBody>
-      </p:sp>
-    </p:spTree>
-  </p:cSld>
-  <p:clrMapOvr>
-    <a:masterClrMapping/>
-  </p:clrMapOvr>
-</p:sld>
-</file>
-
-<file path=ppt/slides/slide4.xml><?xml version="1.0" encoding="utf-8"?>
-<p:sld xmlns:a="http://schemas.openxmlformats.org/drawingml/2006/main" xmlns:p="http://schemas.openxmlformats.org/presentationml/2006/main" xmlns:r="http://schemas.openxmlformats.org/officeDocument/2006/relationships">
-  <p:cSld>
-    <p:spTree>
-      <p:nvGrpSpPr>
-        <p:cNvPr id="1" name=""/>
-        <p:cNvGrpSpPr/>
-        <p:nvPr/>
-      </p:nvGrpSpPr>
-      <p:grpSpPr/>
-      <p:sp>
-        <p:nvSpPr>
-          <p:cNvPr id="4" name="Rectangle 3"/>
-          <p:cNvSpPr/>
-          <p:nvPr/>
-        </p:nvSpPr>
-        <p:spPr>
-          <a:xfrm>
-            <a:off x="-45720" y="-45720"/>
-            <a:ext cx="12344400" cy="6949440"/>
-          </a:xfrm>
-          <a:prstGeom prst="rect">
-            <a:avLst/>
-          </a:prstGeom>
-          <a:solidFill>
-            <a:srgbClr val="1B2024"/>
-          </a:solidFill>
-          <a:ln>
-            <a:noFill/>
-          </a:ln>
-          <a:effectLst/>
-        </p:spPr>
-        <p:style>
-          <a:lnRef idx="1">
-            <a:schemeClr val="accent1"/>
-          </a:lnRef>
-          <a:fillRef idx="3">
-            <a:schemeClr val="accent1"/>
-          </a:fillRef>
-          <a:effectRef idx="2">
-            <a:schemeClr val="accent1"/>
-          </a:effectRef>
-          <a:fontRef idx="minor">
-            <a:schemeClr val="lt1"/>
-          </a:fontRef>
-        </p:style>
-        <p:txBody>
-          <a:bodyPr rtlCol="0" anchor="ctr"/>
-          <a:lstStyle/>
-          <a:p>
-            <a:pPr algn="ctr"/>
-          </a:p>
-        </p:txBody>
-      </p:sp>
-      <p:sp>
-        <p:nvSpPr>
-          <p:cNvPr id="2" name="Title 1"/>
-          <p:cNvSpPr>
-            <a:spLocks noGrp="1"/>
-          </p:cNvSpPr>
-          <p:nvPr>
-            <p:ph type="title"/>
-          </p:nvPr>
-        </p:nvSpPr>
-        <p:spPr>
-          <a:xfrm>
-            <a:off x="640080" y="384048"/>
-            <a:ext cx="10972800" cy="868680"/>
-          </a:xfrm>
-        </p:spPr>
-        <p:txBody>
-          <a:bodyPr wrap="square" anchor="t"/>
-          <a:lstStyle/>
-          <a:p>
-            <a:pPr algn="l"/>
-            <a:r>
-              <a:rPr b="1" sz="2700">
-                <a:solidFill>
-                  <a:srgbClr val="BB8CA9"/>
-                </a:solidFill>
-                <a:latin typeface="Verdana"/>
-              </a:rPr>
-              <a:t>Demonstration highlights</a:t>
-            </a:r>
-          </a:p>
-        </p:txBody>
-      </p:sp>
-      <p:sp>
-        <p:nvSpPr>
-          <p:cNvPr id="3" name="Content Placeholder 2"/>
-          <p:cNvSpPr>
-            <a:spLocks noGrp="1"/>
-          </p:cNvSpPr>
-          <p:nvPr>
-            <p:ph idx="1"/>
-          </p:nvPr>
-        </p:nvSpPr>
-        <p:spPr>
-          <a:xfrm>
-            <a:off x="658368" y="1481328"/>
-            <a:ext cx="5760720" cy="4754880"/>
-          </a:xfrm>
-        </p:spPr>
-        <p:txBody>
-          <a:bodyPr wrap="square">
-            <a:normAutofit/>
-          </a:bodyPr>
-          <a:lstStyle/>
-          <a:p>
-            <a:pPr>
-              <a:spcAft>
-                <a:spcPts val="800"/>
-              </a:spcAft>
-            </a:pPr>
-            <a:r>
-              <a:rPr sz="1500" b="0">
-                <a:solidFill>
-                  <a:srgbClr val="E6EBE8"/>
-                </a:solidFill>
-                <a:latin typeface="Calibri"/>
-              </a:rPr>
-              <a:t>The live dashboard during the local end-to-end run, all four health checks green (top right)</a:t>
-            </a:r>
-          </a:p>
-          <a:p>
-            <a:pPr>
-              <a:spcAft>
-                <a:spcPts val="800"/>
-              </a:spcAft>
-            </a:pPr>
-            <a:r>
-              <a:rPr sz="1500" b="1">
-                <a:solidFill>
-                  <a:srgbClr val="BB8CA9"/>
-                </a:solidFill>
-                <a:latin typeface="Calibri"/>
-              </a:rPr>
-              <a:t>4 / 4 pipeline health checks green: gateway, queue, Lambda, and end-to-end freshness</a:t>
-            </a:r>
-          </a:p>
-          <a:p>
-            <a:pPr>
-              <a:spcAft>
-                <a:spcPts val="800"/>
-              </a:spcAft>
-            </a:pPr>
-            <a:r>
-              <a:rPr sz="1500" b="0">
-                <a:solidFill>
-                  <a:srgbClr val="E6EBE8"/>
-                </a:solidFill>
-                <a:latin typeface="Calibri"/>
-              </a:rPr>
-              <a:t>118 automated JUnit tests pass across the sensor, fog, processor, and dashboard modules</a:t>
-            </a:r>
-          </a:p>
-          <a:p>
-            <a:pPr>
-              <a:spcAft>
-                <a:spcPts val="800"/>
-              </a:spcAft>
-            </a:pPr>
-            <a:r>
-              <a:rPr sz="1500" b="0">
-                <a:solidFill>
-                  <a:srgbClr val="E6EBE8"/>
-                </a:solidFill>
-                <a:latin typeface="Calibri"/>
-              </a:rPr>
-              <a:t>2,000 messages pushed through in a burst load test by 32 parallel workers</a:t>
-            </a:r>
-          </a:p>
-        </p:txBody>
-      </p:sp>
-      <p:sp>
-        <p:nvSpPr>
-          <p:cNvPr id="5" name="Rectangle 4"/>
-          <p:cNvSpPr/>
-          <p:nvPr/>
-        </p:nvSpPr>
-        <p:spPr>
-          <a:xfrm>
-            <a:off x="658368" y="1261872"/>
-            <a:ext cx="3108960" cy="36576"/>
-          </a:xfrm>
-          <a:prstGeom prst="rect">
-            <a:avLst/>
-          </a:prstGeom>
-          <a:solidFill>
-            <a:srgbClr val="BB8CA9"/>
-          </a:solidFill>
-          <a:ln>
-            <a:noFill/>
-          </a:ln>
-          <a:effectLst/>
-        </p:spPr>
-        <p:style>
-          <a:lnRef idx="1">
-            <a:schemeClr val="accent1"/>
-          </a:lnRef>
-          <a:fillRef idx="3">
-            <a:schemeClr val="accent1"/>
-          </a:fillRef>
-          <a:effectRef idx="2">
-            <a:schemeClr val="accent1"/>
-          </a:effectRef>
-          <a:fontRef idx="minor">
-            <a:schemeClr val="lt1"/>
-          </a:fontRef>
-        </p:style>
-        <p:txBody>
-          <a:bodyPr rtlCol="0" anchor="ctr"/>
-          <a:lstStyle/>
-          <a:p>
-            <a:pPr algn="ctr"/>
-          </a:p>
-        </p:txBody>
-      </p:sp>
       <p:pic>
         <p:nvPicPr>
-          <p:cNvPr id="6" name="Picture 5" descr="dashboard-desktop.png"/>
+          <p:cNvPr id="5" name="Picture 4" descr="dashboard-desktop.png"/>
           <p:cNvPicPr>
             <a:picLocks noChangeAspect="1"/>
           </p:cNvPicPr>
@@ -4132,20 +4000,220 @@
       <p:grpSpPr/>
       <p:sp>
         <p:nvSpPr>
+          <p:cNvPr id="2" name="Title 1"/>
+          <p:cNvSpPr>
+            <a:spLocks noGrp="1"/>
+          </p:cNvSpPr>
+          <p:nvPr>
+            <p:ph type="title"/>
+          </p:nvPr>
+        </p:nvSpPr>
+        <p:spPr>
+          <a:xfrm>
+            <a:off x="640080" y="384048"/>
+            <a:ext cx="10972800" cy="868680"/>
+          </a:xfrm>
+        </p:spPr>
+        <p:txBody>
+          <a:bodyPr wrap="square" anchor="t"/>
+          <a:lstStyle/>
+          <a:p>
+            <a:pPr algn="l"/>
+            <a:r>
+              <a:rPr b="1" sz="2700">
+                <a:solidFill>
+                  <a:srgbClr val="8A3A6B"/>
+                </a:solidFill>
+                <a:latin typeface="Verdana"/>
+              </a:rPr>
+              <a:t>Hardest part: one buffer, many writers</a:t>
+            </a:r>
+          </a:p>
+        </p:txBody>
+      </p:sp>
+      <p:sp>
+        <p:nvSpPr>
+          <p:cNvPr id="3" name="Content Placeholder 2"/>
+          <p:cNvSpPr>
+            <a:spLocks noGrp="1"/>
+          </p:cNvSpPr>
+          <p:nvPr>
+            <p:ph idx="1"/>
+          </p:nvPr>
+        </p:nvSpPr>
+        <p:spPr>
+          <a:xfrm>
+            <a:off x="658368" y="1481328"/>
+            <a:ext cx="10972800" cy="4846320"/>
+          </a:xfrm>
+        </p:spPr>
+        <p:txBody>
+          <a:bodyPr wrap="square">
+            <a:normAutofit/>
+          </a:bodyPr>
+          <a:lstStyle/>
+          <a:p>
+            <a:pPr>
+              <a:spcAft>
+                <a:spcPts val="600"/>
+              </a:spcAft>
+            </a:pPr>
+            <a:r>
+              <a:rPr sz="1500" b="1">
+                <a:solidFill>
+                  <a:srgbClr val="8A3A6B"/>
+                </a:solidFill>
+                <a:latin typeface="Calibri"/>
+              </a:rPr>
+              <a:t>The race</a:t>
+            </a:r>
+          </a:p>
+          <a:p>
+            <a:pPr lvl="1">
+              <a:spcAft>
+                <a:spcPts val="600"/>
+              </a:spcAft>
+            </a:pPr>
+            <a:r>
+              <a:rPr sz="1300" b="0">
+                <a:solidFill>
+                  <a:srgbClr val="232A26"/>
+                </a:solidFill>
+                <a:latin typeface="Calibri"/>
+              </a:rPr>
+              <a:t>Every sensor reading arrives on its own web-server thread</a:t>
+            </a:r>
+          </a:p>
+          <a:p>
+            <a:pPr lvl="1">
+              <a:spcAft>
+                <a:spcPts val="600"/>
+              </a:spcAft>
+            </a:pPr>
+            <a:r>
+              <a:rPr sz="1300" b="0">
+                <a:solidFill>
+                  <a:srgbClr val="232A26"/>
+                </a:solidFill>
+                <a:latin typeface="Calibri"/>
+              </a:rPr>
+              <a:t>All of them write into one in-memory buffer while a timer empties it for each window</a:t>
+            </a:r>
+          </a:p>
+          <a:p>
+            <a:pPr lvl="1">
+              <a:spcAft>
+                <a:spcPts val="600"/>
+              </a:spcAft>
+            </a:pPr>
+            <a:r>
+              <a:rPr sz="1300" b="0">
+                <a:solidFill>
+                  <a:srgbClr val="232A26"/>
+                </a:solidFill>
+                <a:latin typeface="Calibri"/>
+              </a:rPr>
+              <a:t>Interleavings that drop readings show up only under load, nearly impossible to reproduce in a test</a:t>
+            </a:r>
+          </a:p>
+          <a:p>
+            <a:pPr>
+              <a:spcAft>
+                <a:spcPts val="600"/>
+              </a:spcAft>
+            </a:pPr>
+            <a:r>
+              <a:rPr sz="1500" b="1">
+                <a:solidFill>
+                  <a:srgbClr val="8A3A6B"/>
+                </a:solidFill>
+                <a:latin typeface="Calibri"/>
+              </a:rPr>
+              <a:t>The fix: an actor mailbox</a:t>
+            </a:r>
+          </a:p>
+          <a:p>
+            <a:pPr lvl="1">
+              <a:spcAft>
+                <a:spcPts val="600"/>
+              </a:spcAft>
+            </a:pPr>
+            <a:r>
+              <a:rPr sz="1300" b="0">
+                <a:solidFill>
+                  <a:srgbClr val="232A26"/>
+                </a:solidFill>
+                <a:latin typeface="Calibri"/>
+              </a:rPr>
+              <a:t>Only one dedicated thread ever touches the buffer</a:t>
+            </a:r>
+          </a:p>
+          <a:p>
+            <a:pPr lvl="1">
+              <a:spcAft>
+                <a:spcPts val="600"/>
+              </a:spcAft>
+            </a:pPr>
+            <a:r>
+              <a:rPr sz="1300" b="0">
+                <a:solidFill>
+                  <a:srgbClr val="232A26"/>
+                </a:solidFill>
+                <a:latin typeface="Calibri"/>
+              </a:rPr>
+              <a:t>A request just drops a message into that thread's mailbox queue and returns</a:t>
+            </a:r>
+          </a:p>
+          <a:p>
+            <a:pPr lvl="1">
+              <a:spcAft>
+                <a:spcPts val="600"/>
+              </a:spcAft>
+            </a:pPr>
+            <a:r>
+              <a:rPr sz="1300" b="0">
+                <a:solidFill>
+                  <a:srgbClr val="232A26"/>
+                </a:solidFill>
+                <a:latin typeface="Calibri"/>
+              </a:rPr>
+              <a:t>A flush is itself a mailbox message, so it can never interleave with a write; the race is structurally impossible, not just locked away</a:t>
+            </a:r>
+          </a:p>
+          <a:p>
+            <a:pPr>
+              <a:spcAft>
+                <a:spcPts val="600"/>
+              </a:spcAft>
+            </a:pPr>
+            <a:r>
+              <a:rPr sz="1500" b="0">
+                <a:solidFill>
+                  <a:srgbClr val="232A26"/>
+                </a:solidFill>
+                <a:latin typeface="Calibri"/>
+              </a:rPr>
+              <a:t>The mailbox flow: 10 request threads, a mailbox queue, a single worker thread, and one windowed buffer</a:t>
+            </a:r>
+          </a:p>
+        </p:txBody>
+      </p:sp>
+      <p:sp>
+        <p:nvSpPr>
           <p:cNvPr id="4" name="Rectangle 3"/>
           <p:cNvSpPr/>
           <p:nvPr/>
         </p:nvSpPr>
         <p:spPr>
           <a:xfrm>
-            <a:off x="-45720" y="-45720"/>
-            <a:ext cx="12344400" cy="6949440"/>
+            <a:off x="658368" y="1261872"/>
+            <a:ext cx="3108960" cy="36576"/>
           </a:xfrm>
           <a:prstGeom prst="rect">
             <a:avLst/>
           </a:prstGeom>
           <a:solidFill>
-            <a:srgbClr val="1B2024"/>
+            <a:srgbClr val="8A3A6B"/>
           </a:solidFill>
           <a:ln>
             <a:noFill/>
@@ -4174,250 +4242,6 @@
           </a:p>
         </p:txBody>
       </p:sp>
-      <p:sp>
-        <p:nvSpPr>
-          <p:cNvPr id="2" name="Title 1"/>
-          <p:cNvSpPr>
-            <a:spLocks noGrp="1"/>
-          </p:cNvSpPr>
-          <p:nvPr>
-            <p:ph type="title"/>
-          </p:nvPr>
-        </p:nvSpPr>
-        <p:spPr>
-          <a:xfrm>
-            <a:off x="640080" y="384048"/>
-            <a:ext cx="10972800" cy="868680"/>
-          </a:xfrm>
-        </p:spPr>
-        <p:txBody>
-          <a:bodyPr wrap="square" anchor="t"/>
-          <a:lstStyle/>
-          <a:p>
-            <a:pPr algn="l"/>
-            <a:r>
-              <a:rPr b="1" sz="2700">
-                <a:solidFill>
-                  <a:srgbClr val="BB8CA9"/>
-                </a:solidFill>
-                <a:latin typeface="Verdana"/>
-              </a:rPr>
-              <a:t>Hardest part: one buffer, many writers</a:t>
-            </a:r>
-          </a:p>
-        </p:txBody>
-      </p:sp>
-      <p:sp>
-        <p:nvSpPr>
-          <p:cNvPr id="3" name="Content Placeholder 2"/>
-          <p:cNvSpPr>
-            <a:spLocks noGrp="1"/>
-          </p:cNvSpPr>
-          <p:nvPr>
-            <p:ph idx="1"/>
-          </p:nvPr>
-        </p:nvSpPr>
-        <p:spPr>
-          <a:xfrm>
-            <a:off x="658368" y="1481328"/>
-            <a:ext cx="10972800" cy="4846320"/>
-          </a:xfrm>
-        </p:spPr>
-        <p:txBody>
-          <a:bodyPr wrap="square">
-            <a:normAutofit/>
-          </a:bodyPr>
-          <a:lstStyle/>
-          <a:p>
-            <a:pPr>
-              <a:spcAft>
-                <a:spcPts val="600"/>
-              </a:spcAft>
-            </a:pPr>
-            <a:r>
-              <a:rPr sz="1500" b="1">
-                <a:solidFill>
-                  <a:srgbClr val="BB8CA9"/>
-                </a:solidFill>
-                <a:latin typeface="Calibri"/>
-              </a:rPr>
-              <a:t>The race</a:t>
-            </a:r>
-          </a:p>
-          <a:p>
-            <a:pPr lvl="1">
-              <a:spcAft>
-                <a:spcPts val="600"/>
-              </a:spcAft>
-            </a:pPr>
-            <a:r>
-              <a:rPr sz="1300" b="0">
-                <a:solidFill>
-                  <a:srgbClr val="E6EBE8"/>
-                </a:solidFill>
-                <a:latin typeface="Calibri"/>
-              </a:rPr>
-              <a:t>Every sensor reading arrives on its own web-server thread</a:t>
-            </a:r>
-          </a:p>
-          <a:p>
-            <a:pPr lvl="1">
-              <a:spcAft>
-                <a:spcPts val="600"/>
-              </a:spcAft>
-            </a:pPr>
-            <a:r>
-              <a:rPr sz="1300" b="0">
-                <a:solidFill>
-                  <a:srgbClr val="E6EBE8"/>
-                </a:solidFill>
-                <a:latin typeface="Calibri"/>
-              </a:rPr>
-              <a:t>All of them write into one in-memory buffer while a timer empties it for each window</a:t>
-            </a:r>
-          </a:p>
-          <a:p>
-            <a:pPr lvl="1">
-              <a:spcAft>
-                <a:spcPts val="600"/>
-              </a:spcAft>
-            </a:pPr>
-            <a:r>
-              <a:rPr sz="1300" b="0">
-                <a:solidFill>
-                  <a:srgbClr val="E6EBE8"/>
-                </a:solidFill>
-                <a:latin typeface="Calibri"/>
-              </a:rPr>
-              <a:t>Interleavings that drop readings show up only under load, nearly impossible to reproduce in a test</a:t>
-            </a:r>
-          </a:p>
-          <a:p>
-            <a:pPr>
-              <a:spcAft>
-                <a:spcPts val="600"/>
-              </a:spcAft>
-            </a:pPr>
-            <a:r>
-              <a:rPr sz="1500" b="1">
-                <a:solidFill>
-                  <a:srgbClr val="BB8CA9"/>
-                </a:solidFill>
-                <a:latin typeface="Calibri"/>
-              </a:rPr>
-              <a:t>The fix: an actor mailbox</a:t>
-            </a:r>
-          </a:p>
-          <a:p>
-            <a:pPr lvl="1">
-              <a:spcAft>
-                <a:spcPts val="600"/>
-              </a:spcAft>
-            </a:pPr>
-            <a:r>
-              <a:rPr sz="1300" b="0">
-                <a:solidFill>
-                  <a:srgbClr val="E6EBE8"/>
-                </a:solidFill>
-                <a:latin typeface="Calibri"/>
-              </a:rPr>
-              <a:t>Only one dedicated thread ever touches the buffer</a:t>
-            </a:r>
-          </a:p>
-          <a:p>
-            <a:pPr lvl="1">
-              <a:spcAft>
-                <a:spcPts val="600"/>
-              </a:spcAft>
-            </a:pPr>
-            <a:r>
-              <a:rPr sz="1300" b="0">
-                <a:solidFill>
-                  <a:srgbClr val="E6EBE8"/>
-                </a:solidFill>
-                <a:latin typeface="Calibri"/>
-              </a:rPr>
-              <a:t>A request just drops a message into that thread's mailbox queue and returns</a:t>
-            </a:r>
-          </a:p>
-          <a:p>
-            <a:pPr lvl="1">
-              <a:spcAft>
-                <a:spcPts val="600"/>
-              </a:spcAft>
-            </a:pPr>
-            <a:r>
-              <a:rPr sz="1300" b="0">
-                <a:solidFill>
-                  <a:srgbClr val="E6EBE8"/>
-                </a:solidFill>
-                <a:latin typeface="Calibri"/>
-              </a:rPr>
-              <a:t>A flush is itself a mailbox message, so it can never interleave with a write; the race is structurally impossible, not just locked away</a:t>
-            </a:r>
-          </a:p>
-          <a:p>
-            <a:pPr>
-              <a:spcAft>
-                <a:spcPts val="600"/>
-              </a:spcAft>
-            </a:pPr>
-            <a:r>
-              <a:rPr sz="1500" b="0">
-                <a:solidFill>
-                  <a:srgbClr val="E6EBE8"/>
-                </a:solidFill>
-                <a:latin typeface="Calibri"/>
-              </a:rPr>
-              <a:t>The mailbox flow: 10 request threads, a mailbox queue, a single worker thread, and one windowed buffer</a:t>
-            </a:r>
-          </a:p>
-        </p:txBody>
-      </p:sp>
-      <p:sp>
-        <p:nvSpPr>
-          <p:cNvPr id="5" name="Rectangle 4"/>
-          <p:cNvSpPr/>
-          <p:nvPr/>
-        </p:nvSpPr>
-        <p:spPr>
-          <a:xfrm>
-            <a:off x="658368" y="1261872"/>
-            <a:ext cx="3108960" cy="36576"/>
-          </a:xfrm>
-          <a:prstGeom prst="rect">
-            <a:avLst/>
-          </a:prstGeom>
-          <a:solidFill>
-            <a:srgbClr val="BB8CA9"/>
-          </a:solidFill>
-          <a:ln>
-            <a:noFill/>
-          </a:ln>
-          <a:effectLst/>
-        </p:spPr>
-        <p:style>
-          <a:lnRef idx="1">
-            <a:schemeClr val="accent1"/>
-          </a:lnRef>
-          <a:fillRef idx="3">
-            <a:schemeClr val="accent1"/>
-          </a:fillRef>
-          <a:effectRef idx="2">
-            <a:schemeClr val="accent1"/>
-          </a:effectRef>
-          <a:fontRef idx="minor">
-            <a:schemeClr val="lt1"/>
-          </a:fontRef>
-        </p:style>
-        <p:txBody>
-          <a:bodyPr rtlCol="0" anchor="ctr"/>
-          <a:lstStyle/>
-          <a:p>
-            <a:pPr algn="ctr"/>
-          </a:p>
-        </p:txBody>
-      </p:sp>
     </p:spTree>
   </p:cSld>
   <p:clrMapOvr>
@@ -4438,50 +4262,6 @@
       <p:grpSpPr/>
       <p:sp>
         <p:nvSpPr>
-          <p:cNvPr id="4" name="Rectangle 3"/>
-          <p:cNvSpPr/>
-          <p:nvPr/>
-        </p:nvSpPr>
-        <p:spPr>
-          <a:xfrm>
-            <a:off x="-45720" y="-45720"/>
-            <a:ext cx="12344400" cy="6949440"/>
-          </a:xfrm>
-          <a:prstGeom prst="rect">
-            <a:avLst/>
-          </a:prstGeom>
-          <a:solidFill>
-            <a:srgbClr val="1B2024"/>
-          </a:solidFill>
-          <a:ln>
-            <a:noFill/>
-          </a:ln>
-          <a:effectLst/>
-        </p:spPr>
-        <p:style>
-          <a:lnRef idx="1">
-            <a:schemeClr val="accent1"/>
-          </a:lnRef>
-          <a:fillRef idx="3">
-            <a:schemeClr val="accent1"/>
-          </a:fillRef>
-          <a:effectRef idx="2">
-            <a:schemeClr val="accent1"/>
-          </a:effectRef>
-          <a:fontRef idx="minor">
-            <a:schemeClr val="lt1"/>
-          </a:fontRef>
-        </p:style>
-        <p:txBody>
-          <a:bodyPr rtlCol="0" anchor="ctr"/>
-          <a:lstStyle/>
-          <a:p>
-            <a:pPr algn="ctr"/>
-          </a:p>
-        </p:txBody>
-      </p:sp>
-      <p:sp>
-        <p:nvSpPr>
           <p:cNvPr id="2" name="Title 1"/>
           <p:cNvSpPr>
             <a:spLocks noGrp="1"/>
@@ -4504,7 +4284,7 @@
             <a:r>
               <a:rPr b="1" sz="2700">
                 <a:solidFill>
-                  <a:srgbClr val="BB8CA9"/>
+                  <a:srgbClr val="8A3A6B"/>
                 </a:solidFill>
                 <a:latin typeface="Verdana"/>
               </a:rPr>
@@ -4543,7 +4323,7 @@
             <a:r>
               <a:rPr sz="1700" b="1">
                 <a:solidFill>
-                  <a:srgbClr val="BB8CA9"/>
+                  <a:srgbClr val="8A3A6B"/>
                 </a:solidFill>
                 <a:latin typeface="Calibri"/>
               </a:rPr>
@@ -4559,7 +4339,7 @@
             <a:r>
               <a:rPr sz="1700" b="0">
                 <a:solidFill>
-                  <a:srgbClr val="E6EBE8"/>
+                  <a:srgbClr val="232A26"/>
                 </a:solidFill>
                 <a:latin typeface="Calibri"/>
               </a:rPr>
@@ -4575,7 +4355,7 @@
             <a:r>
               <a:rPr sz="1700" b="0">
                 <a:solidFill>
-                  <a:srgbClr val="E6EBE8"/>
+                  <a:srgbClr val="232A26"/>
                 </a:solidFill>
                 <a:latin typeface="Calibri"/>
               </a:rPr>
@@ -4591,7 +4371,7 @@
             <a:r>
               <a:rPr sz="1700" b="0">
                 <a:solidFill>
-                  <a:srgbClr val="E6EBE8"/>
+                  <a:srgbClr val="232A26"/>
                 </a:solidFill>
                 <a:latin typeface="Calibri"/>
               </a:rPr>
@@ -4602,7 +4382,7 @@
       </p:sp>
       <p:sp>
         <p:nvSpPr>
-          <p:cNvPr id="5" name="Rectangle 4"/>
+          <p:cNvPr id="4" name="Rectangle 3"/>
           <p:cNvSpPr/>
           <p:nvPr/>
         </p:nvSpPr>
@@ -4615,7 +4395,7 @@
             <a:avLst/>
           </a:prstGeom>
           <a:solidFill>
-            <a:srgbClr val="BB8CA9"/>
+            <a:srgbClr val="8A3A6B"/>
           </a:solidFill>
           <a:ln>
             <a:noFill/>

--- a/ppt/retail-footfall-inventory.pptx
+++ b/ppt/retail-footfall-inventory.pptx
@@ -3328,8 +3328,8 @@
         </p:nvSpPr>
         <p:spPr>
           <a:xfrm>
-            <a:off x="640080" y="384048"/>
-            <a:ext cx="10972800" cy="868680"/>
+            <a:off x="1024128" y="411480"/>
+            <a:ext cx="10424160" cy="868680"/>
           </a:xfrm>
         </p:spPr>
         <p:txBody>
@@ -3361,8 +3361,8 @@
         </p:nvSpPr>
         <p:spPr>
           <a:xfrm>
-            <a:off x="658368" y="1481328"/>
-            <a:ext cx="10972800" cy="4846320"/>
+            <a:off x="1024128" y="1417320"/>
+            <a:ext cx="10515600" cy="4846320"/>
           </a:xfrm>
         </p:spPr>
         <p:txBody>
@@ -3508,8 +3508,8 @@
         </p:nvSpPr>
         <p:spPr>
           <a:xfrm>
-            <a:off x="658368" y="1261872"/>
-            <a:ext cx="3108960" cy="36576"/>
+            <a:off x="640080" y="457200"/>
+            <a:ext cx="100584" cy="5806440"/>
           </a:xfrm>
           <a:prstGeom prst="rect">
             <a:avLst/>
@@ -3574,8 +3574,8 @@
         </p:nvSpPr>
         <p:spPr>
           <a:xfrm>
-            <a:off x="640080" y="384048"/>
-            <a:ext cx="10972800" cy="868680"/>
+            <a:off x="1024128" y="411480"/>
+            <a:ext cx="10424160" cy="868680"/>
           </a:xfrm>
         </p:spPr>
         <p:txBody>
@@ -3607,8 +3607,8 @@
         </p:nvSpPr>
         <p:spPr>
           <a:xfrm>
-            <a:off x="658368" y="1481328"/>
-            <a:ext cx="10972800" cy="4846320"/>
+            <a:off x="1024128" y="1417320"/>
+            <a:ext cx="10515600" cy="4846320"/>
           </a:xfrm>
         </p:spPr>
         <p:txBody>
@@ -3738,8 +3738,8 @@
         </p:nvSpPr>
         <p:spPr>
           <a:xfrm>
-            <a:off x="658368" y="1261872"/>
-            <a:ext cx="3108960" cy="36576"/>
+            <a:off x="640080" y="457200"/>
+            <a:ext cx="100584" cy="5806440"/>
           </a:xfrm>
           <a:prstGeom prst="rect">
             <a:avLst/>
@@ -3804,8 +3804,8 @@
         </p:nvSpPr>
         <p:spPr>
           <a:xfrm>
-            <a:off x="640080" y="384048"/>
-            <a:ext cx="10972800" cy="868680"/>
+            <a:off x="1024128" y="411480"/>
+            <a:ext cx="10424160" cy="868680"/>
           </a:xfrm>
         </p:spPr>
         <p:txBody>
@@ -3837,8 +3837,8 @@
         </p:nvSpPr>
         <p:spPr>
           <a:xfrm>
-            <a:off x="658368" y="1481328"/>
-            <a:ext cx="5760720" cy="4754880"/>
+            <a:off x="1024128" y="1417320"/>
+            <a:ext cx="5440680" cy="4754880"/>
           </a:xfrm>
         </p:spPr>
         <p:txBody>
@@ -3920,8 +3920,8 @@
         </p:nvSpPr>
         <p:spPr>
           <a:xfrm>
-            <a:off x="658368" y="1261872"/>
-            <a:ext cx="3108960" cy="36576"/>
+            <a:off x="640080" y="457200"/>
+            <a:ext cx="100584" cy="5806440"/>
           </a:xfrm>
           <a:prstGeom prst="rect">
             <a:avLst/>
@@ -3972,8 +3972,8 @@
         </p:blipFill>
         <p:spPr>
           <a:xfrm>
-            <a:off x="6629400" y="2003679"/>
-            <a:ext cx="5120640" cy="3600449"/>
+            <a:off x="6675120" y="1967388"/>
+            <a:ext cx="4937760" cy="3471862"/>
           </a:xfrm>
           <a:prstGeom prst="rect">
             <a:avLst/>
@@ -4010,8 +4010,8 @@
         </p:nvSpPr>
         <p:spPr>
           <a:xfrm>
-            <a:off x="640080" y="384048"/>
-            <a:ext cx="10972800" cy="868680"/>
+            <a:off x="1024128" y="411480"/>
+            <a:ext cx="10424160" cy="868680"/>
           </a:xfrm>
         </p:spPr>
         <p:txBody>
@@ -4043,8 +4043,8 @@
         </p:nvSpPr>
         <p:spPr>
           <a:xfrm>
-            <a:off x="658368" y="1481328"/>
-            <a:ext cx="10972800" cy="4846320"/>
+            <a:off x="1024128" y="1417320"/>
+            <a:ext cx="10515600" cy="4846320"/>
           </a:xfrm>
         </p:spPr>
         <p:txBody>
@@ -4206,8 +4206,8 @@
         </p:nvSpPr>
         <p:spPr>
           <a:xfrm>
-            <a:off x="658368" y="1261872"/>
-            <a:ext cx="3108960" cy="36576"/>
+            <a:off x="640080" y="457200"/>
+            <a:ext cx="100584" cy="5806440"/>
           </a:xfrm>
           <a:prstGeom prst="rect">
             <a:avLst/>
@@ -4272,8 +4272,8 @@
         </p:nvSpPr>
         <p:spPr>
           <a:xfrm>
-            <a:off x="640080" y="384048"/>
-            <a:ext cx="10972800" cy="868680"/>
+            <a:off x="1024128" y="411480"/>
+            <a:ext cx="10424160" cy="868680"/>
           </a:xfrm>
         </p:spPr>
         <p:txBody>
@@ -4305,8 +4305,8 @@
         </p:nvSpPr>
         <p:spPr>
           <a:xfrm>
-            <a:off x="658368" y="1481328"/>
-            <a:ext cx="10972800" cy="4846320"/>
+            <a:off x="1024128" y="1417320"/>
+            <a:ext cx="10515600" cy="4846320"/>
           </a:xfrm>
         </p:spPr>
         <p:txBody>
@@ -4388,8 +4388,8 @@
         </p:nvSpPr>
         <p:spPr>
           <a:xfrm>
-            <a:off x="658368" y="1261872"/>
-            <a:ext cx="3108960" cy="36576"/>
+            <a:off x="640080" y="457200"/>
+            <a:ext cx="100584" cy="5806440"/>
           </a:xfrm>
           <a:prstGeom prst="rect">
             <a:avLst/>

--- a/ppt/retail-footfall-inventory.pptx
+++ b/ppt/retail-footfall-inventory.pptx
@@ -3108,7 +3108,7 @@
             <a:avLst/>
           </a:prstGeom>
           <a:solidFill>
-            <a:srgbClr val="8A3A6B"/>
+            <a:srgbClr val="6D4C7D"/>
           </a:solidFill>
           <a:ln>
             <a:noFill/>
@@ -3139,20 +3139,20 @@
       </p:sp>
       <p:sp>
         <p:nvSpPr>
-          <p:cNvPr id="3" name="Right Triangle 2"/>
+          <p:cNvPr id="3" name="Rectangle 2"/>
           <p:cNvSpPr/>
           <p:nvPr/>
         </p:nvSpPr>
         <p:spPr>
-          <a:xfrm rot="10800000">
-            <a:off x="-91440" y="3108960"/>
-            <a:ext cx="6858000" cy="3840480"/>
+          <a:xfrm>
+            <a:off x="0" y="0"/>
+            <a:ext cx="4297680" cy="6858000"/>
           </a:xfrm>
-          <a:prstGeom prst="rtTriangle">
+          <a:prstGeom prst="rect">
             <a:avLst/>
           </a:prstGeom>
           <a:solidFill>
-            <a:srgbClr val="5B2646"/>
+            <a:srgbClr val="4C3557"/>
           </a:solidFill>
           <a:ln>
             <a:noFill/>
@@ -3189,8 +3189,8 @@
         </p:nvSpPr>
         <p:spPr>
           <a:xfrm>
-            <a:off x="868680" y="1691640"/>
-            <a:ext cx="10332720" cy="2011680"/>
+            <a:off x="457200" y="1920240"/>
+            <a:ext cx="3383280" cy="3017520"/>
           </a:xfrm>
           <a:prstGeom prst="rect">
             <a:avLst/>
@@ -3198,20 +3198,20 @@
           <a:noFill/>
         </p:spPr>
         <p:txBody>
-          <a:bodyPr wrap="square" anchor="t">
+          <a:bodyPr wrap="square" anchor="ctr">
             <a:spAutoFit/>
           </a:bodyPr>
           <a:lstStyle/>
           <a:p>
             <a:pPr algn="l"/>
             <a:r>
-              <a:rPr sz="3400" b="1" i="0">
-                <a:solidFill>
-                  <a:srgbClr val="FFFFFF"/>
+              <a:rPr sz="1600" b="0" i="1">
+                <a:solidFill>
+                  <a:srgbClr val="E9E4EB"/>
                 </a:solidFill>
                 <a:latin typeface="Verdana"/>
               </a:rPr>
-              <a:t>Retail Footfall and Inventory Monitoring</a:t>
+              <a:t>Two stores, ten sensors, one live edge-to-cloud pipeline</a:t>
             </a:r>
           </a:p>
         </p:txBody>
@@ -3224,8 +3224,8 @@
         </p:nvSpPr>
         <p:spPr>
           <a:xfrm>
-            <a:off x="868680" y="3794760"/>
-            <a:ext cx="8686800" cy="640080"/>
+            <a:off x="4754880" y="1783080"/>
+            <a:ext cx="7040880" cy="2377440"/>
           </a:xfrm>
           <a:prstGeom prst="rect">
             <a:avLst/>
@@ -3233,20 +3233,20 @@
           <a:noFill/>
         </p:spPr>
         <p:txBody>
-          <a:bodyPr wrap="square" anchor="t">
+          <a:bodyPr wrap="square" anchor="ctr">
             <a:spAutoFit/>
           </a:bodyPr>
           <a:lstStyle/>
           <a:p>
             <a:pPr algn="l"/>
             <a:r>
-              <a:rPr sz="1700" b="0" i="1">
-                <a:solidFill>
-                  <a:srgbClr val="E7D7E1"/>
-                </a:solidFill>
-                <a:latin typeface="Calibri"/>
+              <a:rPr sz="3200" b="1" i="0">
+                <a:solidFill>
+                  <a:srgbClr val="FFFFFF"/>
+                </a:solidFill>
+                <a:latin typeface="Trebuchet MS"/>
               </a:rPr>
-              <a:t>Two stores, ten sensors, one live edge-to-cloud pipeline</a:t>
+              <a:t>Retail Footfall and Inventory Monitoring</a:t>
             </a:r>
           </a:p>
         </p:txBody>
@@ -3259,8 +3259,8 @@
         </p:nvSpPr>
         <p:spPr>
           <a:xfrm>
-            <a:off x="868680" y="4709160"/>
-            <a:ext cx="8229600" cy="1463040"/>
+            <a:off x="4754880" y="4434840"/>
+            <a:ext cx="6858000" cy="1645920"/>
           </a:xfrm>
           <a:prstGeom prst="rect">
             <a:avLst/>
@@ -3277,9 +3277,9 @@
             <a:r>
               <a:rPr sz="1250" b="0" i="0">
                 <a:solidFill>
-                  <a:srgbClr val="E9DBE4"/>
-                </a:solidFill>
-                <a:latin typeface="Calibri"/>
+                  <a:srgbClr val="D3C9D8"/>
+                </a:solidFill>
+                <a:latin typeface="Verdana"/>
               </a:rPr>
               <a:t>MSc in Cloud Computing   ·   Fog and Edge Computing (H9FECC)</a:t>
             </a:r>
@@ -3289,9 +3289,9 @@
             <a:r>
               <a:rPr sz="1250" b="0" i="0">
                 <a:solidFill>
-                  <a:srgbClr val="E9DBE4"/>
-                </a:solidFill>
-                <a:latin typeface="Calibri"/>
+                  <a:srgbClr val="D3C9D8"/>
+                </a:solidFill>
+                <a:latin typeface="Verdana"/>
               </a:rPr>
               <a:t>National College of Ireland</a:t>
             </a:r>
@@ -3328,8 +3328,8 @@
         </p:nvSpPr>
         <p:spPr>
           <a:xfrm>
-            <a:off x="1024128" y="411480"/>
-            <a:ext cx="10424160" cy="868680"/>
+            <a:off x="640080" y="384048"/>
+            <a:ext cx="10972800" cy="868680"/>
           </a:xfrm>
         </p:spPr>
         <p:txBody>
@@ -3340,9 +3340,9 @@
             <a:r>
               <a:rPr b="1" sz="2700">
                 <a:solidFill>
-                  <a:srgbClr val="8A3A6B"/>
-                </a:solidFill>
-                <a:latin typeface="Verdana"/>
+                  <a:srgbClr val="6D4C7D"/>
+                </a:solidFill>
+                <a:latin typeface="Trebuchet MS"/>
               </a:rPr>
               <a:t>Why periodic checking fails</a:t>
             </a:r>
@@ -3356,13 +3356,13 @@
             <a:spLocks noGrp="1"/>
           </p:cNvSpPr>
           <p:nvPr>
-            <p:ph idx="1"/>
+            <p:ph idx="1" sz="half"/>
           </p:nvPr>
         </p:nvSpPr>
         <p:spPr>
           <a:xfrm>
-            <a:off x="1024128" y="1417320"/>
-            <a:ext cx="10515600" cy="4846320"/>
+            <a:off x="658368" y="1481328"/>
+            <a:ext cx="5120640" cy="4846320"/>
           </a:xfrm>
         </p:spPr>
         <p:txBody>
@@ -3373,15 +3373,15 @@
           <a:p>
             <a:pPr>
               <a:spcAft>
-                <a:spcPts val="600"/>
+                <a:spcPts val="800"/>
               </a:spcAft>
             </a:pPr>
             <a:r>
-              <a:rPr sz="1500" b="1">
-                <a:solidFill>
-                  <a:srgbClr val="8A3A6B"/>
-                </a:solidFill>
-                <a:latin typeface="Calibri"/>
+              <a:rPr sz="1500" b="0">
+                <a:solidFill>
+                  <a:srgbClr val="232A26"/>
+                </a:solidFill>
+                <a:latin typeface="Verdana"/>
               </a:rPr>
               <a:t>Periodic, manual checks</a:t>
             </a:r>
@@ -3389,7 +3389,7 @@
           <a:p>
             <a:pPr lvl="1">
               <a:spcAft>
-                <a:spcPts val="600"/>
+                <a:spcPts val="800"/>
               </a:spcAft>
             </a:pPr>
             <a:r>
@@ -3397,7 +3397,7 @@
                 <a:solidFill>
                   <a:srgbClr val="232A26"/>
                 </a:solidFill>
-                <a:latin typeface="Calibri"/>
+                <a:latin typeface="Verdana"/>
               </a:rPr>
               <a:t>Empty shelves sit unnoticed between stock walks, and sales are lost silently</a:t>
             </a:r>
@@ -3405,7 +3405,7 @@
           <a:p>
             <a:pPr lvl="1">
               <a:spcAft>
-                <a:spcPts val="600"/>
+                <a:spcPts val="800"/>
               </a:spcAft>
             </a:pPr>
             <a:r>
@@ -3413,7 +3413,7 @@
                 <a:solidFill>
                   <a:srgbClr val="232A26"/>
                 </a:solidFill>
-                <a:latin typeface="Calibri"/>
+                <a:latin typeface="Verdana"/>
               </a:rPr>
               <a:t>A fridge drifting warm between rounds puts the whole cold chain at risk</a:t>
             </a:r>
@@ -3421,7 +3421,7 @@
           <a:p>
             <a:pPr lvl="1">
               <a:spcAft>
-                <a:spcPts val="600"/>
+                <a:spcPts val="800"/>
               </a:spcAft>
             </a:pPr>
             <a:r>
@@ -3429,23 +3429,46 @@
                 <a:solidFill>
                   <a:srgbClr val="232A26"/>
                 </a:solidFill>
-                <a:latin typeface="Calibri"/>
+                <a:latin typeface="Verdana"/>
               </a:rPr>
               <a:t>Checkout queues build in minutes; by the next walk-through, customers are already gone</a:t>
             </a:r>
           </a:p>
+        </p:txBody>
+      </p:sp>
+      <p:sp>
+        <p:nvSpPr>
+          <p:cNvPr id="4" name="Content Placeholder 3"/>
+          <p:cNvSpPr>
+            <a:spLocks noGrp="1"/>
+          </p:cNvSpPr>
+          <p:nvPr>
+            <p:ph idx="2" sz="half"/>
+          </p:nvPr>
+        </p:nvSpPr>
+        <p:spPr>
+          <a:xfrm>
+            <a:off x="6355080" y="1481328"/>
+            <a:ext cx="5120640" cy="4846320"/>
+          </a:xfrm>
+        </p:spPr>
+        <p:txBody>
+          <a:bodyPr wrap="square">
+            <a:normAutofit/>
+          </a:bodyPr>
+          <a:lstStyle/>
           <a:p>
             <a:pPr>
               <a:spcAft>
-                <a:spcPts val="600"/>
+                <a:spcPts val="800"/>
               </a:spcAft>
             </a:pPr>
             <a:r>
-              <a:rPr sz="1500" b="1">
-                <a:solidFill>
-                  <a:srgbClr val="8A3A6B"/>
-                </a:solidFill>
-                <a:latin typeface="Calibri"/>
+              <a:rPr sz="1500" b="0">
+                <a:solidFill>
+                  <a:srgbClr val="232A26"/>
+                </a:solidFill>
+                <a:latin typeface="Verdana"/>
               </a:rPr>
               <a:t>Continuous edge monitoring</a:t>
             </a:r>
@@ -3453,7 +3476,7 @@
           <a:p>
             <a:pPr lvl="1">
               <a:spcAft>
-                <a:spcPts val="600"/>
+                <a:spcPts val="800"/>
               </a:spcAft>
             </a:pPr>
             <a:r>
@@ -3461,7 +3484,7 @@
                 <a:solidFill>
                   <a:srgbClr val="232A26"/>
                 </a:solidFill>
-                <a:latin typeface="Calibri"/>
+                <a:latin typeface="Verdana"/>
               </a:rPr>
               <a:t>Ten sensors across two stores: footfall, shelf stock, fridge temperature, queue length, energy draw</a:t>
             </a:r>
@@ -3469,7 +3492,7 @@
           <a:p>
             <a:pPr lvl="1">
               <a:spcAft>
-                <a:spcPts val="600"/>
+                <a:spcPts val="800"/>
               </a:spcAft>
             </a:pPr>
             <a:r>
@@ -3477,7 +3500,7 @@
                 <a:solidFill>
                   <a:srgbClr val="232A26"/>
                 </a:solidFill>
-                <a:latin typeface="Calibri"/>
+                <a:latin typeface="Verdana"/>
               </a:rPr>
               <a:t>A fog gateway windows and aggregates readings right beside the shop floor</a:t>
             </a:r>
@@ -3485,7 +3508,7 @@
           <a:p>
             <a:pPr lvl="1">
               <a:spcAft>
-                <a:spcPts val="600"/>
+                <a:spcPts val="800"/>
               </a:spcAft>
             </a:pPr>
             <a:r>
@@ -3493,7 +3516,7 @@
                 <a:solidFill>
                   <a:srgbClr val="232A26"/>
                 </a:solidFill>
-                <a:latin typeface="Calibri"/>
+                <a:latin typeface="Verdana"/>
               </a:rPr>
               <a:t>Four retail-health rules raise an alert the moment a window crosses its threshold</a:t>
             </a:r>
@@ -3502,20 +3525,20 @@
       </p:sp>
       <p:sp>
         <p:nvSpPr>
-          <p:cNvPr id="4" name="Rectangle 3"/>
+          <p:cNvPr id="5" name="Rectangle 4"/>
           <p:cNvSpPr/>
           <p:nvPr/>
         </p:nvSpPr>
         <p:spPr>
           <a:xfrm>
-            <a:off x="640080" y="457200"/>
-            <a:ext cx="100584" cy="5806440"/>
+            <a:off x="658368" y="1261872"/>
+            <a:ext cx="3108960" cy="36576"/>
           </a:xfrm>
           <a:prstGeom prst="rect">
             <a:avLst/>
           </a:prstGeom>
           <a:solidFill>
-            <a:srgbClr val="8A3A6B"/>
+            <a:srgbClr val="6D4C7D"/>
           </a:solidFill>
           <a:ln>
             <a:noFill/>
@@ -3574,8 +3597,8 @@
         </p:nvSpPr>
         <p:spPr>
           <a:xfrm>
-            <a:off x="1024128" y="411480"/>
-            <a:ext cx="10424160" cy="868680"/>
+            <a:off x="640080" y="384048"/>
+            <a:ext cx="10972800" cy="868680"/>
           </a:xfrm>
         </p:spPr>
         <p:txBody>
@@ -3586,9 +3609,9 @@
             <a:r>
               <a:rPr b="1" sz="2700">
                 <a:solidFill>
-                  <a:srgbClr val="8A3A6B"/>
-                </a:solidFill>
-                <a:latin typeface="Verdana"/>
+                  <a:srgbClr val="6D4C7D"/>
+                </a:solidFill>
+                <a:latin typeface="Trebuchet MS"/>
               </a:rPr>
               <a:t>How it works</a:t>
             </a:r>
@@ -3602,13 +3625,13 @@
             <a:spLocks noGrp="1"/>
           </p:cNvSpPr>
           <p:nvPr>
-            <p:ph idx="1"/>
+            <p:ph idx="1" sz="half"/>
           </p:nvPr>
         </p:nvSpPr>
         <p:spPr>
           <a:xfrm>
-            <a:off x="1024128" y="1417320"/>
-            <a:ext cx="10515600" cy="4846320"/>
+            <a:off x="658368" y="1481328"/>
+            <a:ext cx="5120640" cy="4846320"/>
           </a:xfrm>
         </p:spPr>
         <p:txBody>
@@ -3619,15 +3642,15 @@
           <a:p>
             <a:pPr>
               <a:spcAft>
-                <a:spcPts val="900"/>
+                <a:spcPts val="800"/>
               </a:spcAft>
             </a:pPr>
             <a:r>
-              <a:rPr sz="1700" b="0">
+              <a:rPr sz="1500" b="0">
                 <a:solidFill>
                   <a:srgbClr val="232A26"/>
                 </a:solidFill>
-                <a:latin typeface="Calibri"/>
+                <a:latin typeface="Verdana"/>
               </a:rPr>
               <a:t>Store sensors: 5 metrics x 2 stores, sampled every few seconds</a:t>
             </a:r>
@@ -3635,15 +3658,15 @@
           <a:p>
             <a:pPr>
               <a:spcAft>
-                <a:spcPts val="900"/>
+                <a:spcPts val="800"/>
               </a:spcAft>
             </a:pPr>
             <a:r>
-              <a:rPr sz="1700" b="0">
+              <a:rPr sz="1500" b="0">
                 <a:solidFill>
                   <a:srgbClr val="232A26"/>
                 </a:solidFill>
-                <a:latin typeface="Calibri"/>
+                <a:latin typeface="Verdana"/>
               </a:rPr>
               <a:t>Fog gateway: windows, aggregates, and evaluates alert rules</a:t>
             </a:r>
@@ -3651,15 +3674,15 @@
           <a:p>
             <a:pPr>
               <a:spcAft>
-                <a:spcPts val="900"/>
+                <a:spcPts val="800"/>
               </a:spcAft>
             </a:pPr>
             <a:r>
-              <a:rPr sz="1700" b="0">
+              <a:rPr sz="1500" b="0">
                 <a:solidFill>
                   <a:srgbClr val="232A26"/>
                 </a:solidFill>
-                <a:latin typeface="Calibri"/>
+                <a:latin typeface="Verdana"/>
               </a:rPr>
               <a:t>Amazon SQS: one aggregate per window on the queue</a:t>
             </a:r>
@@ -3667,31 +3690,54 @@
           <a:p>
             <a:pPr>
               <a:spcAft>
-                <a:spcPts val="900"/>
+                <a:spcPts val="800"/>
               </a:spcAft>
             </a:pPr>
             <a:r>
-              <a:rPr sz="1700" b="0">
+              <a:rPr sz="1500" b="0">
                 <a:solidFill>
                   <a:srgbClr val="232A26"/>
                 </a:solidFill>
-                <a:latin typeface="Calibri"/>
+                <a:latin typeface="Verdana"/>
               </a:rPr>
               <a:t>AWS Lambda: serverless ingest of each batch</a:t>
             </a:r>
           </a:p>
+        </p:txBody>
+      </p:sp>
+      <p:sp>
+        <p:nvSpPr>
+          <p:cNvPr id="4" name="Content Placeholder 3"/>
+          <p:cNvSpPr>
+            <a:spLocks noGrp="1"/>
+          </p:cNvSpPr>
+          <p:nvPr>
+            <p:ph idx="2" sz="half"/>
+          </p:nvPr>
+        </p:nvSpPr>
+        <p:spPr>
+          <a:xfrm>
+            <a:off x="6355080" y="1481328"/>
+            <a:ext cx="5120640" cy="4846320"/>
+          </a:xfrm>
+        </p:spPr>
+        <p:txBody>
+          <a:bodyPr wrap="square">
+            <a:normAutofit/>
+          </a:bodyPr>
+          <a:lstStyle/>
           <a:p>
             <a:pPr>
               <a:spcAft>
-                <a:spcPts val="900"/>
+                <a:spcPts val="800"/>
               </a:spcAft>
             </a:pPr>
             <a:r>
-              <a:rPr sz="1700" b="0">
+              <a:rPr sz="1500" b="0">
                 <a:solidFill>
                   <a:srgbClr val="232A26"/>
                 </a:solidFill>
-                <a:latin typeface="Calibri"/>
+                <a:latin typeface="Verdana"/>
               </a:rPr>
               <a:t>Amazon DynamoDB: durable store of aggregates</a:t>
             </a:r>
@@ -3699,15 +3745,15 @@
           <a:p>
             <a:pPr>
               <a:spcAft>
-                <a:spcPts val="900"/>
+                <a:spcPts val="800"/>
               </a:spcAft>
             </a:pPr>
             <a:r>
-              <a:rPr sz="1700" b="0">
+              <a:rPr sz="1500" b="0">
                 <a:solidFill>
                   <a:srgbClr val="232A26"/>
                 </a:solidFill>
-                <a:latin typeface="Calibri"/>
+                <a:latin typeface="Verdana"/>
               </a:rPr>
               <a:t>Live dashboard: Amazon S3 and API Gateway</a:t>
             </a:r>
@@ -3715,15 +3761,15 @@
           <a:p>
             <a:pPr>
               <a:spcAft>
-                <a:spcPts val="900"/>
+                <a:spcPts val="800"/>
               </a:spcAft>
             </a:pPr>
             <a:r>
-              <a:rPr sz="1700" b="1">
-                <a:solidFill>
-                  <a:srgbClr val="8A3A6B"/>
-                </a:solidFill>
-                <a:latin typeface="Calibri"/>
+              <a:rPr sz="1500" b="0">
+                <a:solidFill>
+                  <a:srgbClr val="232A26"/>
+                </a:solidFill>
+                <a:latin typeface="Verdana"/>
               </a:rPr>
               <a:t>Verified end-to-end locally with Docker and an AWS emulator, deploys to real AWS with a single scripted step</a:t>
             </a:r>
@@ -3732,20 +3778,20 @@
       </p:sp>
       <p:sp>
         <p:nvSpPr>
-          <p:cNvPr id="4" name="Rectangle 3"/>
+          <p:cNvPr id="5" name="Rectangle 4"/>
           <p:cNvSpPr/>
           <p:nvPr/>
         </p:nvSpPr>
         <p:spPr>
           <a:xfrm>
-            <a:off x="640080" y="457200"/>
-            <a:ext cx="100584" cy="5806440"/>
+            <a:off x="658368" y="1261872"/>
+            <a:ext cx="3108960" cy="36576"/>
           </a:xfrm>
           <a:prstGeom prst="rect">
             <a:avLst/>
           </a:prstGeom>
           <a:solidFill>
-            <a:srgbClr val="8A3A6B"/>
+            <a:srgbClr val="6D4C7D"/>
           </a:solidFill>
           <a:ln>
             <a:noFill/>
@@ -3804,8 +3850,8 @@
         </p:nvSpPr>
         <p:spPr>
           <a:xfrm>
-            <a:off x="1024128" y="411480"/>
-            <a:ext cx="10424160" cy="868680"/>
+            <a:off x="640080" y="384048"/>
+            <a:ext cx="10972800" cy="868680"/>
           </a:xfrm>
         </p:spPr>
         <p:txBody>
@@ -3816,9 +3862,9 @@
             <a:r>
               <a:rPr b="1" sz="2700">
                 <a:solidFill>
-                  <a:srgbClr val="8A3A6B"/>
-                </a:solidFill>
-                <a:latin typeface="Verdana"/>
+                  <a:srgbClr val="6D4C7D"/>
+                </a:solidFill>
+                <a:latin typeface="Trebuchet MS"/>
               </a:rPr>
               <a:t>Demonstration highlights</a:t>
             </a:r>
@@ -3837,8 +3883,8 @@
         </p:nvSpPr>
         <p:spPr>
           <a:xfrm>
-            <a:off x="1024128" y="1417320"/>
-            <a:ext cx="5440680" cy="4754880"/>
+            <a:off x="658368" y="1481328"/>
+            <a:ext cx="5760720" cy="4754880"/>
           </a:xfrm>
         </p:spPr>
         <p:txBody>
@@ -3857,7 +3903,7 @@
                 <a:solidFill>
                   <a:srgbClr val="232A26"/>
                 </a:solidFill>
-                <a:latin typeface="Calibri"/>
+                <a:latin typeface="Verdana"/>
               </a:rPr>
               <a:t>The live dashboard during the local end-to-end run, all four health checks green (top right)</a:t>
             </a:r>
@@ -3869,11 +3915,11 @@
               </a:spcAft>
             </a:pPr>
             <a:r>
-              <a:rPr sz="1500" b="1">
-                <a:solidFill>
-                  <a:srgbClr val="8A3A6B"/>
-                </a:solidFill>
-                <a:latin typeface="Calibri"/>
+              <a:rPr sz="1500" b="0">
+                <a:solidFill>
+                  <a:srgbClr val="232A26"/>
+                </a:solidFill>
+                <a:latin typeface="Verdana"/>
               </a:rPr>
               <a:t>4 / 4 pipeline health checks green: gateway, queue, Lambda, and end-to-end freshness</a:t>
             </a:r>
@@ -3889,7 +3935,7 @@
                 <a:solidFill>
                   <a:srgbClr val="232A26"/>
                 </a:solidFill>
-                <a:latin typeface="Calibri"/>
+                <a:latin typeface="Verdana"/>
               </a:rPr>
               <a:t>118 automated JUnit tests pass across the sensor, fog, processor, and dashboard modules</a:t>
             </a:r>
@@ -3905,7 +3951,7 @@
                 <a:solidFill>
                   <a:srgbClr val="232A26"/>
                 </a:solidFill>
-                <a:latin typeface="Calibri"/>
+                <a:latin typeface="Verdana"/>
               </a:rPr>
               <a:t>2,000 messages pushed through in a burst load test by 32 parallel workers</a:t>
             </a:r>
@@ -3920,14 +3966,14 @@
         </p:nvSpPr>
         <p:spPr>
           <a:xfrm>
-            <a:off x="640080" y="457200"/>
-            <a:ext cx="100584" cy="5806440"/>
+            <a:off x="658368" y="1261872"/>
+            <a:ext cx="3108960" cy="36576"/>
           </a:xfrm>
           <a:prstGeom prst="rect">
             <a:avLst/>
           </a:prstGeom>
           <a:solidFill>
-            <a:srgbClr val="8A3A6B"/>
+            <a:srgbClr val="6D4C7D"/>
           </a:solidFill>
           <a:ln>
             <a:noFill/>
@@ -3972,8 +4018,8 @@
         </p:blipFill>
         <p:spPr>
           <a:xfrm>
-            <a:off x="6675120" y="1967388"/>
-            <a:ext cx="4937760" cy="3471862"/>
+            <a:off x="6629400" y="2003679"/>
+            <a:ext cx="5120640" cy="3600449"/>
           </a:xfrm>
           <a:prstGeom prst="rect">
             <a:avLst/>
@@ -4010,8 +4056,8 @@
         </p:nvSpPr>
         <p:spPr>
           <a:xfrm>
-            <a:off x="1024128" y="411480"/>
-            <a:ext cx="10424160" cy="868680"/>
+            <a:off x="640080" y="384048"/>
+            <a:ext cx="10972800" cy="868680"/>
           </a:xfrm>
         </p:spPr>
         <p:txBody>
@@ -4022,9 +4068,9 @@
             <a:r>
               <a:rPr b="1" sz="2700">
                 <a:solidFill>
-                  <a:srgbClr val="8A3A6B"/>
-                </a:solidFill>
-                <a:latin typeface="Verdana"/>
+                  <a:srgbClr val="6D4C7D"/>
+                </a:solidFill>
+                <a:latin typeface="Trebuchet MS"/>
               </a:rPr>
               <a:t>Hardest part: one buffer, many writers</a:t>
             </a:r>
@@ -4038,13 +4084,13 @@
             <a:spLocks noGrp="1"/>
           </p:cNvSpPr>
           <p:nvPr>
-            <p:ph idx="1"/>
+            <p:ph idx="1" sz="half"/>
           </p:nvPr>
         </p:nvSpPr>
         <p:spPr>
           <a:xfrm>
-            <a:off x="1024128" y="1417320"/>
-            <a:ext cx="10515600" cy="4846320"/>
+            <a:off x="658368" y="1481328"/>
+            <a:ext cx="5120640" cy="4846320"/>
           </a:xfrm>
         </p:spPr>
         <p:txBody>
@@ -4055,15 +4101,15 @@
           <a:p>
             <a:pPr>
               <a:spcAft>
-                <a:spcPts val="600"/>
+                <a:spcPts val="800"/>
               </a:spcAft>
             </a:pPr>
             <a:r>
-              <a:rPr sz="1500" b="1">
-                <a:solidFill>
-                  <a:srgbClr val="8A3A6B"/>
-                </a:solidFill>
-                <a:latin typeface="Calibri"/>
+              <a:rPr sz="1500" b="0">
+                <a:solidFill>
+                  <a:srgbClr val="232A26"/>
+                </a:solidFill>
+                <a:latin typeface="Verdana"/>
               </a:rPr>
               <a:t>The race</a:t>
             </a:r>
@@ -4071,7 +4117,7 @@
           <a:p>
             <a:pPr lvl="1">
               <a:spcAft>
-                <a:spcPts val="600"/>
+                <a:spcPts val="800"/>
               </a:spcAft>
             </a:pPr>
             <a:r>
@@ -4079,7 +4125,7 @@
                 <a:solidFill>
                   <a:srgbClr val="232A26"/>
                 </a:solidFill>
-                <a:latin typeface="Calibri"/>
+                <a:latin typeface="Verdana"/>
               </a:rPr>
               <a:t>Every sensor reading arrives on its own web-server thread</a:t>
             </a:r>
@@ -4087,7 +4133,7 @@
           <a:p>
             <a:pPr lvl="1">
               <a:spcAft>
-                <a:spcPts val="600"/>
+                <a:spcPts val="800"/>
               </a:spcAft>
             </a:pPr>
             <a:r>
@@ -4095,7 +4141,7 @@
                 <a:solidFill>
                   <a:srgbClr val="232A26"/>
                 </a:solidFill>
-                <a:latin typeface="Calibri"/>
+                <a:latin typeface="Verdana"/>
               </a:rPr>
               <a:t>All of them write into one in-memory buffer while a timer empties it for each window</a:t>
             </a:r>
@@ -4103,7 +4149,7 @@
           <a:p>
             <a:pPr lvl="1">
               <a:spcAft>
-                <a:spcPts val="600"/>
+                <a:spcPts val="800"/>
               </a:spcAft>
             </a:pPr>
             <a:r>
@@ -4111,7 +4157,7 @@
                 <a:solidFill>
                   <a:srgbClr val="232A26"/>
                 </a:solidFill>
-                <a:latin typeface="Calibri"/>
+                <a:latin typeface="Verdana"/>
               </a:rPr>
               <a:t>Interleavings that drop readings show up only under load, nearly impossible to reproduce in a test</a:t>
             </a:r>
@@ -4119,15 +4165,15 @@
           <a:p>
             <a:pPr>
               <a:spcAft>
-                <a:spcPts val="600"/>
+                <a:spcPts val="800"/>
               </a:spcAft>
             </a:pPr>
             <a:r>
-              <a:rPr sz="1500" b="1">
-                <a:solidFill>
-                  <a:srgbClr val="8A3A6B"/>
-                </a:solidFill>
-                <a:latin typeface="Calibri"/>
+              <a:rPr sz="1500" b="0">
+                <a:solidFill>
+                  <a:srgbClr val="232A26"/>
+                </a:solidFill>
+                <a:latin typeface="Verdana"/>
               </a:rPr>
               <a:t>The fix: an actor mailbox</a:t>
             </a:r>
@@ -4135,7 +4181,7 @@
           <a:p>
             <a:pPr lvl="1">
               <a:spcAft>
-                <a:spcPts val="600"/>
+                <a:spcPts val="800"/>
               </a:spcAft>
             </a:pPr>
             <a:r>
@@ -4143,7 +4189,7 @@
                 <a:solidFill>
                   <a:srgbClr val="232A26"/>
                 </a:solidFill>
-                <a:latin typeface="Calibri"/>
+                <a:latin typeface="Verdana"/>
               </a:rPr>
               <a:t>Only one dedicated thread ever touches the buffer</a:t>
             </a:r>
@@ -4151,7 +4197,7 @@
           <a:p>
             <a:pPr lvl="1">
               <a:spcAft>
-                <a:spcPts val="600"/>
+                <a:spcPts val="800"/>
               </a:spcAft>
             </a:pPr>
             <a:r>
@@ -4159,7 +4205,7 @@
                 <a:solidFill>
                   <a:srgbClr val="232A26"/>
                 </a:solidFill>
-                <a:latin typeface="Calibri"/>
+                <a:latin typeface="Verdana"/>
               </a:rPr>
               <a:t>A request just drops a message into that thread's mailbox queue and returns</a:t>
             </a:r>
@@ -4167,7 +4213,7 @@
           <a:p>
             <a:pPr lvl="1">
               <a:spcAft>
-                <a:spcPts val="600"/>
+                <a:spcPts val="800"/>
               </a:spcAft>
             </a:pPr>
             <a:r>
@@ -4175,15 +4221,38 @@
                 <a:solidFill>
                   <a:srgbClr val="232A26"/>
                 </a:solidFill>
-                <a:latin typeface="Calibri"/>
+                <a:latin typeface="Verdana"/>
               </a:rPr>
               <a:t>A flush is itself a mailbox message, so it can never interleave with a write; the race is structurally impossible, not just locked away</a:t>
             </a:r>
           </a:p>
+        </p:txBody>
+      </p:sp>
+      <p:sp>
+        <p:nvSpPr>
+          <p:cNvPr id="4" name="Content Placeholder 3"/>
+          <p:cNvSpPr>
+            <a:spLocks noGrp="1"/>
+          </p:cNvSpPr>
+          <p:nvPr>
+            <p:ph idx="2" sz="half"/>
+          </p:nvPr>
+        </p:nvSpPr>
+        <p:spPr>
+          <a:xfrm>
+            <a:off x="6355080" y="1481328"/>
+            <a:ext cx="5120640" cy="4846320"/>
+          </a:xfrm>
+        </p:spPr>
+        <p:txBody>
+          <a:bodyPr wrap="square">
+            <a:normAutofit/>
+          </a:bodyPr>
+          <a:lstStyle/>
           <a:p>
             <a:pPr>
               <a:spcAft>
-                <a:spcPts val="600"/>
+                <a:spcPts val="800"/>
               </a:spcAft>
             </a:pPr>
             <a:r>
@@ -4191,7 +4260,7 @@
                 <a:solidFill>
                   <a:srgbClr val="232A26"/>
                 </a:solidFill>
-                <a:latin typeface="Calibri"/>
+                <a:latin typeface="Verdana"/>
               </a:rPr>
               <a:t>The mailbox flow: 10 request threads, a mailbox queue, a single worker thread, and one windowed buffer</a:t>
             </a:r>
@@ -4200,20 +4269,20 @@
       </p:sp>
       <p:sp>
         <p:nvSpPr>
-          <p:cNvPr id="4" name="Rectangle 3"/>
+          <p:cNvPr id="5" name="Rectangle 4"/>
           <p:cNvSpPr/>
           <p:nvPr/>
         </p:nvSpPr>
         <p:spPr>
           <a:xfrm>
-            <a:off x="640080" y="457200"/>
-            <a:ext cx="100584" cy="5806440"/>
+            <a:off x="658368" y="1261872"/>
+            <a:ext cx="3108960" cy="36576"/>
           </a:xfrm>
           <a:prstGeom prst="rect">
             <a:avLst/>
           </a:prstGeom>
           <a:solidFill>
-            <a:srgbClr val="8A3A6B"/>
+            <a:srgbClr val="6D4C7D"/>
           </a:solidFill>
           <a:ln>
             <a:noFill/>
@@ -4272,8 +4341,8 @@
         </p:nvSpPr>
         <p:spPr>
           <a:xfrm>
-            <a:off x="1024128" y="411480"/>
-            <a:ext cx="10424160" cy="868680"/>
+            <a:off x="640080" y="384048"/>
+            <a:ext cx="10972800" cy="868680"/>
           </a:xfrm>
         </p:spPr>
         <p:txBody>
@@ -4284,9 +4353,9 @@
             <a:r>
               <a:rPr b="1" sz="2700">
                 <a:solidFill>
-                  <a:srgbClr val="8A3A6B"/>
-                </a:solidFill>
-                <a:latin typeface="Verdana"/>
+                  <a:srgbClr val="6D4C7D"/>
+                </a:solidFill>
+                <a:latin typeface="Trebuchet MS"/>
               </a:rPr>
               <a:t>What to take away</a:t>
             </a:r>
@@ -4300,13 +4369,13 @@
             <a:spLocks noGrp="1"/>
           </p:cNvSpPr>
           <p:nvPr>
-            <p:ph idx="1"/>
+            <p:ph idx="1" sz="half"/>
           </p:nvPr>
         </p:nvSpPr>
         <p:spPr>
           <a:xfrm>
-            <a:off x="1024128" y="1417320"/>
-            <a:ext cx="10515600" cy="4846320"/>
+            <a:off x="658368" y="1481328"/>
+            <a:ext cx="5120640" cy="4846320"/>
           </a:xfrm>
         </p:spPr>
         <p:txBody>
@@ -4317,15 +4386,15 @@
           <a:p>
             <a:pPr>
               <a:spcAft>
-                <a:spcPts val="900"/>
+                <a:spcPts val="800"/>
               </a:spcAft>
             </a:pPr>
             <a:r>
-              <a:rPr sz="1700" b="1">
-                <a:solidFill>
-                  <a:srgbClr val="8A3A6B"/>
-                </a:solidFill>
-                <a:latin typeface="Calibri"/>
+              <a:rPr sz="1500" b="0">
+                <a:solidFill>
+                  <a:srgbClr val="232A26"/>
+                </a:solidFill>
+                <a:latin typeface="Verdana"/>
               </a:rPr>
               <a:t>Put the intelligence at the edge: windowing and alerting beside the shop floor turn raw readings into store-level decisions in seconds</a:t>
             </a:r>
@@ -4333,31 +4402,54 @@
           <a:p>
             <a:pPr>
               <a:spcAft>
-                <a:spcPts val="900"/>
+                <a:spcPts val="800"/>
               </a:spcAft>
             </a:pPr>
             <a:r>
-              <a:rPr sz="1700" b="0">
+              <a:rPr sz="1500" b="0">
                 <a:solidFill>
                   <a:srgbClr val="232A26"/>
                 </a:solidFill>
-                <a:latin typeface="Calibri"/>
+                <a:latin typeface="Verdana"/>
               </a:rPr>
               <a:t>The whole pipeline is verified end-to-end locally and deploys to real AWS with a single scripted step</a:t>
             </a:r>
           </a:p>
+        </p:txBody>
+      </p:sp>
+      <p:sp>
+        <p:nvSpPr>
+          <p:cNvPr id="4" name="Content Placeholder 3"/>
+          <p:cNvSpPr>
+            <a:spLocks noGrp="1"/>
+          </p:cNvSpPr>
+          <p:nvPr>
+            <p:ph idx="2" sz="half"/>
+          </p:nvPr>
+        </p:nvSpPr>
+        <p:spPr>
+          <a:xfrm>
+            <a:off x="6355080" y="1481328"/>
+            <a:ext cx="5120640" cy="4846320"/>
+          </a:xfrm>
+        </p:spPr>
+        <p:txBody>
+          <a:bodyPr wrap="square">
+            <a:normAutofit/>
+          </a:bodyPr>
+          <a:lstStyle/>
           <a:p>
             <a:pPr>
               <a:spcAft>
-                <a:spcPts val="900"/>
+                <a:spcPts val="800"/>
               </a:spcAft>
             </a:pPr>
             <a:r>
-              <a:rPr sz="1700" b="0">
+              <a:rPr sz="1500" b="0">
                 <a:solidFill>
                   <a:srgbClr val="232A26"/>
                 </a:solidFill>
-                <a:latin typeface="Calibri"/>
+                <a:latin typeface="Verdana"/>
               </a:rPr>
               <a:t>Design concurrency out rather than guarding it: the actor mailbox made data races structurally impossible</a:t>
             </a:r>
@@ -4365,15 +4457,15 @@
           <a:p>
             <a:pPr>
               <a:spcAft>
-                <a:spcPts val="900"/>
+                <a:spcPts val="800"/>
               </a:spcAft>
             </a:pPr>
             <a:r>
-              <a:rPr sz="1700" b="0">
+              <a:rPr sz="1500" b="0">
                 <a:solidFill>
                   <a:srgbClr val="232A26"/>
                 </a:solidFill>
-                <a:latin typeface="Calibri"/>
+                <a:latin typeface="Verdana"/>
               </a:rPr>
               <a:t>Thank you. Questions?</a:t>
             </a:r>
@@ -4382,20 +4474,20 @@
       </p:sp>
       <p:sp>
         <p:nvSpPr>
-          <p:cNvPr id="4" name="Rectangle 3"/>
+          <p:cNvPr id="5" name="Rectangle 4"/>
           <p:cNvSpPr/>
           <p:nvPr/>
         </p:nvSpPr>
         <p:spPr>
           <a:xfrm>
-            <a:off x="640080" y="457200"/>
-            <a:ext cx="100584" cy="5806440"/>
+            <a:off x="658368" y="1261872"/>
+            <a:ext cx="3108960" cy="36576"/>
           </a:xfrm>
           <a:prstGeom prst="rect">
             <a:avLst/>
           </a:prstGeom>
           <a:solidFill>
-            <a:srgbClr val="8A3A6B"/>
+            <a:srgbClr val="6D4C7D"/>
           </a:solidFill>
           <a:ln>
             <a:noFill/>
